--- a/docs/pptx/entire/ritu-entire-linsubhr-ratio-hosp10_10pct.pptx
+++ b/docs/pptx/entire/ritu-entire-linsubhr-ratio-hosp10_10pct.pptx
@@ -3432,612 +3432,612 @@
           </p:nvSpPr>
           <p:spPr>
             <a:xfrm>
-              <a:off x="1172049" y="3201037"/>
-              <a:ext cx="7090630" cy="2041967"/>
+              <a:off x="1172049" y="3202349"/>
+              <a:ext cx="7090630" cy="2040492"/>
             </a:xfrm>
             <a:custGeom>
               <a:avLst/>
               <a:pathLst>
-                <a:path w="7090630" h="2041967">
+                <a:path w="7090630" h="2040492">
                   <a:moveTo>
-                    <a:pt x="0" y="1227035"/>
+                    <a:pt x="0" y="1224365"/>
                   </a:moveTo>
                   <a:lnTo>
-                    <a:pt x="71622" y="1234314"/>
-                  </a:lnTo>
-                  <a:lnTo>
-                    <a:pt x="143245" y="1241546"/>
-                  </a:lnTo>
-                  <a:lnTo>
-                    <a:pt x="214867" y="1248732"/>
-                  </a:lnTo>
-                  <a:lnTo>
-                    <a:pt x="286490" y="1255871"/>
-                  </a:lnTo>
-                  <a:lnTo>
-                    <a:pt x="358112" y="1262964"/>
-                  </a:lnTo>
-                  <a:lnTo>
-                    <a:pt x="429735" y="1270012"/>
-                  </a:lnTo>
-                  <a:lnTo>
-                    <a:pt x="501357" y="1277014"/>
-                  </a:lnTo>
-                  <a:lnTo>
-                    <a:pt x="572980" y="1283971"/>
-                  </a:lnTo>
-                  <a:lnTo>
-                    <a:pt x="644602" y="1290883"/>
-                  </a:lnTo>
-                  <a:lnTo>
-                    <a:pt x="716225" y="1297751"/>
-                  </a:lnTo>
-                  <a:lnTo>
-                    <a:pt x="787847" y="1304574"/>
-                  </a:lnTo>
-                  <a:lnTo>
-                    <a:pt x="859470" y="1311353"/>
-                  </a:lnTo>
-                  <a:lnTo>
-                    <a:pt x="931092" y="1318089"/>
-                  </a:lnTo>
-                  <a:lnTo>
-                    <a:pt x="1002715" y="1324781"/>
-                  </a:lnTo>
-                  <a:lnTo>
-                    <a:pt x="1074337" y="1331430"/>
-                  </a:lnTo>
-                  <a:lnTo>
-                    <a:pt x="1145960" y="1338037"/>
-                  </a:lnTo>
-                  <a:lnTo>
-                    <a:pt x="1217582" y="1344600"/>
-                  </a:lnTo>
-                  <a:lnTo>
-                    <a:pt x="1289205" y="1351122"/>
-                  </a:lnTo>
-                  <a:lnTo>
-                    <a:pt x="1360827" y="1357601"/>
-                  </a:lnTo>
-                  <a:lnTo>
-                    <a:pt x="1432450" y="1364038"/>
-                  </a:lnTo>
-                  <a:lnTo>
-                    <a:pt x="1504073" y="1370434"/>
-                  </a:lnTo>
-                  <a:lnTo>
-                    <a:pt x="1575695" y="1376789"/>
-                  </a:lnTo>
-                  <a:lnTo>
-                    <a:pt x="1647318" y="1383103"/>
-                  </a:lnTo>
-                  <a:lnTo>
-                    <a:pt x="1718940" y="1389376"/>
-                  </a:lnTo>
-                  <a:lnTo>
-                    <a:pt x="1790563" y="1395609"/>
-                  </a:lnTo>
-                  <a:lnTo>
-                    <a:pt x="1862185" y="1401801"/>
-                  </a:lnTo>
-                  <a:lnTo>
-                    <a:pt x="1933808" y="1407954"/>
-                  </a:lnTo>
-                  <a:lnTo>
-                    <a:pt x="2005430" y="1414067"/>
-                  </a:lnTo>
-                  <a:lnTo>
-                    <a:pt x="2077053" y="1420140"/>
-                  </a:lnTo>
-                  <a:lnTo>
-                    <a:pt x="2148675" y="1426175"/>
-                  </a:lnTo>
-                  <a:lnTo>
-                    <a:pt x="2220298" y="1432170"/>
-                  </a:lnTo>
-                  <a:lnTo>
-                    <a:pt x="2291920" y="1438127"/>
-                  </a:lnTo>
-                  <a:lnTo>
-                    <a:pt x="2363543" y="1444045"/>
-                  </a:lnTo>
-                  <a:lnTo>
-                    <a:pt x="2435165" y="1449925"/>
-                  </a:lnTo>
-                  <a:lnTo>
-                    <a:pt x="2506788" y="1455768"/>
-                  </a:lnTo>
-                  <a:lnTo>
-                    <a:pt x="2578410" y="1461572"/>
-                  </a:lnTo>
-                  <a:lnTo>
-                    <a:pt x="2650033" y="1467340"/>
-                  </a:lnTo>
-                  <a:lnTo>
-                    <a:pt x="2721655" y="1473070"/>
-                  </a:lnTo>
-                  <a:lnTo>
-                    <a:pt x="2793278" y="1478763"/>
-                  </a:lnTo>
-                  <a:lnTo>
-                    <a:pt x="2864901" y="1484419"/>
-                  </a:lnTo>
-                  <a:lnTo>
-                    <a:pt x="2936523" y="1490039"/>
-                  </a:lnTo>
-                  <a:lnTo>
-                    <a:pt x="3008146" y="1495623"/>
-                  </a:lnTo>
-                  <a:lnTo>
-                    <a:pt x="3079768" y="1501171"/>
-                  </a:lnTo>
-                  <a:lnTo>
-                    <a:pt x="3151391" y="1506683"/>
-                  </a:lnTo>
-                  <a:lnTo>
-                    <a:pt x="3223013" y="1512159"/>
-                  </a:lnTo>
-                  <a:lnTo>
-                    <a:pt x="3294636" y="1517600"/>
-                  </a:lnTo>
-                  <a:lnTo>
-                    <a:pt x="3366258" y="1523006"/>
-                  </a:lnTo>
-                  <a:lnTo>
-                    <a:pt x="3437881" y="1521599"/>
-                  </a:lnTo>
-                  <a:lnTo>
-                    <a:pt x="3509503" y="1504441"/>
-                  </a:lnTo>
-                  <a:lnTo>
-                    <a:pt x="3581126" y="1486930"/>
-                  </a:lnTo>
-                  <a:lnTo>
-                    <a:pt x="3652748" y="1469059"/>
-                  </a:lnTo>
-                  <a:lnTo>
-                    <a:pt x="3724371" y="1450821"/>
-                  </a:lnTo>
-                  <a:lnTo>
-                    <a:pt x="3795993" y="1432208"/>
-                  </a:lnTo>
-                  <a:lnTo>
-                    <a:pt x="3867616" y="1413212"/>
-                  </a:lnTo>
-                  <a:lnTo>
-                    <a:pt x="3939238" y="1393825"/>
-                  </a:lnTo>
-                  <a:lnTo>
-                    <a:pt x="4010861" y="1374040"/>
-                  </a:lnTo>
-                  <a:lnTo>
-                    <a:pt x="4082483" y="1353848"/>
-                  </a:lnTo>
-                  <a:lnTo>
-                    <a:pt x="4154106" y="1333241"/>
-                  </a:lnTo>
-                  <a:lnTo>
-                    <a:pt x="4225729" y="1312211"/>
-                  </a:lnTo>
-                  <a:lnTo>
-                    <a:pt x="4297351" y="1290748"/>
-                  </a:lnTo>
-                  <a:lnTo>
-                    <a:pt x="4368974" y="1268844"/>
-                  </a:lnTo>
-                  <a:lnTo>
-                    <a:pt x="4440596" y="1246489"/>
-                  </a:lnTo>
-                  <a:lnTo>
-                    <a:pt x="4512219" y="1223675"/>
-                  </a:lnTo>
-                  <a:lnTo>
-                    <a:pt x="4583841" y="1200392"/>
-                  </a:lnTo>
-                  <a:lnTo>
-                    <a:pt x="4655464" y="1176630"/>
-                  </a:lnTo>
-                  <a:lnTo>
-                    <a:pt x="4727086" y="1152380"/>
-                  </a:lnTo>
-                  <a:lnTo>
-                    <a:pt x="4798709" y="1127631"/>
-                  </a:lnTo>
-                  <a:lnTo>
-                    <a:pt x="4870331" y="1102374"/>
-                  </a:lnTo>
-                  <a:lnTo>
-                    <a:pt x="4941954" y="1076597"/>
-                  </a:lnTo>
-                  <a:lnTo>
-                    <a:pt x="5013576" y="1050290"/>
-                  </a:lnTo>
-                  <a:lnTo>
-                    <a:pt x="5085199" y="1023442"/>
-                  </a:lnTo>
-                  <a:lnTo>
-                    <a:pt x="5156821" y="996043"/>
-                  </a:lnTo>
-                  <a:lnTo>
-                    <a:pt x="5228444" y="968080"/>
-                  </a:lnTo>
-                  <a:lnTo>
-                    <a:pt x="5300066" y="939542"/>
-                  </a:lnTo>
-                  <a:lnTo>
-                    <a:pt x="5371689" y="910418"/>
-                  </a:lnTo>
-                  <a:lnTo>
-                    <a:pt x="5443311" y="880695"/>
-                  </a:lnTo>
-                  <a:lnTo>
-                    <a:pt x="5514934" y="850361"/>
-                  </a:lnTo>
-                  <a:lnTo>
-                    <a:pt x="5586557" y="819403"/>
-                  </a:lnTo>
-                  <a:lnTo>
-                    <a:pt x="5658179" y="787809"/>
-                  </a:lnTo>
-                  <a:lnTo>
-                    <a:pt x="5729802" y="755565"/>
-                  </a:lnTo>
-                  <a:lnTo>
-                    <a:pt x="5801424" y="722658"/>
-                  </a:lnTo>
-                  <a:lnTo>
-                    <a:pt x="5873047" y="689075"/>
-                  </a:lnTo>
-                  <a:lnTo>
-                    <a:pt x="5944669" y="654802"/>
-                  </a:lnTo>
-                  <a:lnTo>
-                    <a:pt x="6016292" y="619823"/>
-                  </a:lnTo>
-                  <a:lnTo>
-                    <a:pt x="6087914" y="584126"/>
-                  </a:lnTo>
-                  <a:lnTo>
-                    <a:pt x="6159537" y="547695"/>
-                  </a:lnTo>
-                  <a:lnTo>
-                    <a:pt x="6231159" y="510515"/>
-                  </a:lnTo>
-                  <a:lnTo>
-                    <a:pt x="6302782" y="472570"/>
-                  </a:lnTo>
-                  <a:lnTo>
-                    <a:pt x="6374404" y="433846"/>
-                  </a:lnTo>
-                  <a:lnTo>
-                    <a:pt x="6446027" y="394325"/>
-                  </a:lnTo>
-                  <a:lnTo>
-                    <a:pt x="6517649" y="353992"/>
-                  </a:lnTo>
-                  <a:lnTo>
-                    <a:pt x="6589272" y="312830"/>
-                  </a:lnTo>
-                  <a:lnTo>
-                    <a:pt x="6660894" y="270821"/>
-                  </a:lnTo>
-                  <a:lnTo>
-                    <a:pt x="6732517" y="227949"/>
-                  </a:lnTo>
-                  <a:lnTo>
-                    <a:pt x="6804139" y="184196"/>
-                  </a:lnTo>
-                  <a:lnTo>
-                    <a:pt x="6875762" y="139542"/>
-                  </a:lnTo>
-                  <a:lnTo>
-                    <a:pt x="6947385" y="93971"/>
-                  </a:lnTo>
-                  <a:lnTo>
-                    <a:pt x="7019007" y="47464"/>
+                    <a:pt x="71622" y="1231682"/>
+                  </a:lnTo>
+                  <a:lnTo>
+                    <a:pt x="143245" y="1238950"/>
+                  </a:lnTo>
+                  <a:lnTo>
+                    <a:pt x="214867" y="1246172"/>
+                  </a:lnTo>
+                  <a:lnTo>
+                    <a:pt x="286490" y="1253347"/>
+                  </a:lnTo>
+                  <a:lnTo>
+                    <a:pt x="358112" y="1260476"/>
+                  </a:lnTo>
+                  <a:lnTo>
+                    <a:pt x="429735" y="1267559"/>
+                  </a:lnTo>
+                  <a:lnTo>
+                    <a:pt x="501357" y="1274595"/>
+                  </a:lnTo>
+                  <a:lnTo>
+                    <a:pt x="572980" y="1281587"/>
+                  </a:lnTo>
+                  <a:lnTo>
+                    <a:pt x="644602" y="1288532"/>
+                  </a:lnTo>
+                  <a:lnTo>
+                    <a:pt x="716225" y="1295433"/>
+                  </a:lnTo>
+                  <a:lnTo>
+                    <a:pt x="787847" y="1302290"/>
+                  </a:lnTo>
+                  <a:lnTo>
+                    <a:pt x="859470" y="1309102"/>
+                  </a:lnTo>
+                  <a:lnTo>
+                    <a:pt x="931092" y="1315870"/>
+                  </a:lnTo>
+                  <a:lnTo>
+                    <a:pt x="1002715" y="1322594"/>
+                  </a:lnTo>
+                  <a:lnTo>
+                    <a:pt x="1074337" y="1329274"/>
+                  </a:lnTo>
+                  <a:lnTo>
+                    <a:pt x="1145960" y="1335912"/>
+                  </a:lnTo>
+                  <a:lnTo>
+                    <a:pt x="1217582" y="1342506"/>
+                  </a:lnTo>
+                  <a:lnTo>
+                    <a:pt x="1289205" y="1349058"/>
+                  </a:lnTo>
+                  <a:lnTo>
+                    <a:pt x="1360827" y="1355567"/>
+                  </a:lnTo>
+                  <a:lnTo>
+                    <a:pt x="1432450" y="1362034"/>
+                  </a:lnTo>
+                  <a:lnTo>
+                    <a:pt x="1504073" y="1368459"/>
+                  </a:lnTo>
+                  <a:lnTo>
+                    <a:pt x="1575695" y="1374843"/>
+                  </a:lnTo>
+                  <a:lnTo>
+                    <a:pt x="1647318" y="1381186"/>
+                  </a:lnTo>
+                  <a:lnTo>
+                    <a:pt x="1718940" y="1387487"/>
+                  </a:lnTo>
+                  <a:lnTo>
+                    <a:pt x="1790563" y="1393748"/>
+                  </a:lnTo>
+                  <a:lnTo>
+                    <a:pt x="1862185" y="1399968"/>
+                  </a:lnTo>
+                  <a:lnTo>
+                    <a:pt x="1933808" y="1406147"/>
+                  </a:lnTo>
+                  <a:lnTo>
+                    <a:pt x="2005430" y="1412287"/>
+                  </a:lnTo>
+                  <a:lnTo>
+                    <a:pt x="2077053" y="1418387"/>
+                  </a:lnTo>
+                  <a:lnTo>
+                    <a:pt x="2148675" y="1424448"/>
+                  </a:lnTo>
+                  <a:lnTo>
+                    <a:pt x="2220298" y="1430469"/>
+                  </a:lnTo>
+                  <a:lnTo>
+                    <a:pt x="2291920" y="1436452"/>
+                  </a:lnTo>
+                  <a:lnTo>
+                    <a:pt x="2363543" y="1442396"/>
+                  </a:lnTo>
+                  <a:lnTo>
+                    <a:pt x="2435165" y="1448301"/>
+                  </a:lnTo>
+                  <a:lnTo>
+                    <a:pt x="2506788" y="1454168"/>
+                  </a:lnTo>
+                  <a:lnTo>
+                    <a:pt x="2578410" y="1459997"/>
+                  </a:lnTo>
+                  <a:lnTo>
+                    <a:pt x="2650033" y="1465788"/>
+                  </a:lnTo>
+                  <a:lnTo>
+                    <a:pt x="2721655" y="1471542"/>
+                  </a:lnTo>
+                  <a:lnTo>
+                    <a:pt x="2793278" y="1477259"/>
+                  </a:lnTo>
+                  <a:lnTo>
+                    <a:pt x="2864901" y="1482938"/>
+                  </a:lnTo>
+                  <a:lnTo>
+                    <a:pt x="2936523" y="1488581"/>
+                  </a:lnTo>
+                  <a:lnTo>
+                    <a:pt x="3008146" y="1494188"/>
+                  </a:lnTo>
+                  <a:lnTo>
+                    <a:pt x="3079768" y="1499758"/>
+                  </a:lnTo>
+                  <a:lnTo>
+                    <a:pt x="3151391" y="1505292"/>
+                  </a:lnTo>
+                  <a:lnTo>
+                    <a:pt x="3223013" y="1510790"/>
+                  </a:lnTo>
+                  <a:lnTo>
+                    <a:pt x="3294636" y="1516253"/>
+                  </a:lnTo>
+                  <a:lnTo>
+                    <a:pt x="3366258" y="1521680"/>
+                  </a:lnTo>
+                  <a:lnTo>
+                    <a:pt x="3437881" y="1520290"/>
+                  </a:lnTo>
+                  <a:lnTo>
+                    <a:pt x="3509503" y="1503141"/>
+                  </a:lnTo>
+                  <a:lnTo>
+                    <a:pt x="3581126" y="1485640"/>
+                  </a:lnTo>
+                  <a:lnTo>
+                    <a:pt x="3652748" y="1467779"/>
+                  </a:lnTo>
+                  <a:lnTo>
+                    <a:pt x="3724371" y="1449551"/>
+                  </a:lnTo>
+                  <a:lnTo>
+                    <a:pt x="3795993" y="1430949"/>
+                  </a:lnTo>
+                  <a:lnTo>
+                    <a:pt x="3867616" y="1411964"/>
+                  </a:lnTo>
+                  <a:lnTo>
+                    <a:pt x="3939238" y="1392589"/>
+                  </a:lnTo>
+                  <a:lnTo>
+                    <a:pt x="4010861" y="1372817"/>
+                  </a:lnTo>
+                  <a:lnTo>
+                    <a:pt x="4082483" y="1352637"/>
+                  </a:lnTo>
+                  <a:lnTo>
+                    <a:pt x="4154106" y="1332044"/>
+                  </a:lnTo>
+                  <a:lnTo>
+                    <a:pt x="4225729" y="1311027"/>
+                  </a:lnTo>
+                  <a:lnTo>
+                    <a:pt x="4297351" y="1289578"/>
+                  </a:lnTo>
+                  <a:lnTo>
+                    <a:pt x="4368974" y="1267689"/>
+                  </a:lnTo>
+                  <a:lnTo>
+                    <a:pt x="4440596" y="1245349"/>
+                  </a:lnTo>
+                  <a:lnTo>
+                    <a:pt x="4512219" y="1222551"/>
+                  </a:lnTo>
+                  <a:lnTo>
+                    <a:pt x="4583841" y="1199285"/>
+                  </a:lnTo>
+                  <a:lnTo>
+                    <a:pt x="4655464" y="1175540"/>
+                  </a:lnTo>
+                  <a:lnTo>
+                    <a:pt x="4727086" y="1151307"/>
+                  </a:lnTo>
+                  <a:lnTo>
+                    <a:pt x="4798709" y="1126577"/>
+                  </a:lnTo>
+                  <a:lnTo>
+                    <a:pt x="4870331" y="1101338"/>
+                  </a:lnTo>
+                  <a:lnTo>
+                    <a:pt x="4941954" y="1075581"/>
+                  </a:lnTo>
+                  <a:lnTo>
+                    <a:pt x="5013576" y="1049294"/>
+                  </a:lnTo>
+                  <a:lnTo>
+                    <a:pt x="5085199" y="1022468"/>
+                  </a:lnTo>
+                  <a:lnTo>
+                    <a:pt x="5156821" y="995090"/>
+                  </a:lnTo>
+                  <a:lnTo>
+                    <a:pt x="5228444" y="967149"/>
+                  </a:lnTo>
+                  <a:lnTo>
+                    <a:pt x="5300066" y="938635"/>
+                  </a:lnTo>
+                  <a:lnTo>
+                    <a:pt x="5371689" y="909535"/>
+                  </a:lnTo>
+                  <a:lnTo>
+                    <a:pt x="5443311" y="879836"/>
+                  </a:lnTo>
+                  <a:lnTo>
+                    <a:pt x="5514934" y="849528"/>
+                  </a:lnTo>
+                  <a:lnTo>
+                    <a:pt x="5586557" y="818597"/>
+                  </a:lnTo>
+                  <a:lnTo>
+                    <a:pt x="5658179" y="787030"/>
+                  </a:lnTo>
+                  <a:lnTo>
+                    <a:pt x="5729802" y="754814"/>
+                  </a:lnTo>
+                  <a:lnTo>
+                    <a:pt x="5801424" y="721937"/>
+                  </a:lnTo>
+                  <a:lnTo>
+                    <a:pt x="5873047" y="688384"/>
+                  </a:lnTo>
+                  <a:lnTo>
+                    <a:pt x="5944669" y="654142"/>
+                  </a:lnTo>
+                  <a:lnTo>
+                    <a:pt x="6016292" y="619196"/>
+                  </a:lnTo>
+                  <a:lnTo>
+                    <a:pt x="6087914" y="583532"/>
+                  </a:lnTo>
+                  <a:lnTo>
+                    <a:pt x="6159537" y="547135"/>
+                  </a:lnTo>
+                  <a:lnTo>
+                    <a:pt x="6231159" y="509990"/>
+                  </a:lnTo>
+                  <a:lnTo>
+                    <a:pt x="6302782" y="472082"/>
+                  </a:lnTo>
+                  <a:lnTo>
+                    <a:pt x="6374404" y="433396"/>
+                  </a:lnTo>
+                  <a:lnTo>
+                    <a:pt x="6446027" y="393914"/>
+                  </a:lnTo>
+                  <a:lnTo>
+                    <a:pt x="6517649" y="353621"/>
+                  </a:lnTo>
+                  <a:lnTo>
+                    <a:pt x="6589272" y="312500"/>
+                  </a:lnTo>
+                  <a:lnTo>
+                    <a:pt x="6660894" y="270535"/>
+                  </a:lnTo>
+                  <a:lnTo>
+                    <a:pt x="6732517" y="227707"/>
+                  </a:lnTo>
+                  <a:lnTo>
+                    <a:pt x="6804139" y="183999"/>
+                  </a:lnTo>
+                  <a:lnTo>
+                    <a:pt x="6875762" y="139393"/>
+                  </a:lnTo>
+                  <a:lnTo>
+                    <a:pt x="6947385" y="93870"/>
+                  </a:lnTo>
+                  <a:lnTo>
+                    <a:pt x="7019007" y="47412"/>
                   </a:lnTo>
                   <a:lnTo>
                     <a:pt x="7090630" y="0"/>
                   </a:lnTo>
                   <a:lnTo>
-                    <a:pt x="7090630" y="1760963"/>
-                  </a:lnTo>
-                  <a:lnTo>
-                    <a:pt x="7019007" y="1757101"/>
-                  </a:lnTo>
-                  <a:lnTo>
-                    <a:pt x="6947385" y="1753214"/>
-                  </a:lnTo>
-                  <a:lnTo>
-                    <a:pt x="6875762" y="1749302"/>
-                  </a:lnTo>
-                  <a:lnTo>
-                    <a:pt x="6804139" y="1745364"/>
-                  </a:lnTo>
-                  <a:lnTo>
-                    <a:pt x="6732517" y="1741400"/>
-                  </a:lnTo>
-                  <a:lnTo>
-                    <a:pt x="6660894" y="1737411"/>
-                  </a:lnTo>
-                  <a:lnTo>
-                    <a:pt x="6589272" y="1733396"/>
-                  </a:lnTo>
-                  <a:lnTo>
-                    <a:pt x="6517649" y="1729355"/>
-                  </a:lnTo>
-                  <a:lnTo>
-                    <a:pt x="6446027" y="1725288"/>
-                  </a:lnTo>
-                  <a:lnTo>
-                    <a:pt x="6374404" y="1721194"/>
-                  </a:lnTo>
-                  <a:lnTo>
-                    <a:pt x="6302782" y="1717074"/>
-                  </a:lnTo>
-                  <a:lnTo>
-                    <a:pt x="6231159" y="1712927"/>
-                  </a:lnTo>
-                  <a:lnTo>
-                    <a:pt x="6159537" y="1708754"/>
-                  </a:lnTo>
-                  <a:lnTo>
-                    <a:pt x="6087914" y="1704553"/>
-                  </a:lnTo>
-                  <a:lnTo>
-                    <a:pt x="6016292" y="1700325"/>
-                  </a:lnTo>
-                  <a:lnTo>
-                    <a:pt x="5944669" y="1696069"/>
-                  </a:lnTo>
-                  <a:lnTo>
-                    <a:pt x="5873047" y="1691786"/>
-                  </a:lnTo>
-                  <a:lnTo>
-                    <a:pt x="5801424" y="1687475"/>
-                  </a:lnTo>
-                  <a:lnTo>
-                    <a:pt x="5729802" y="1683136"/>
-                  </a:lnTo>
-                  <a:lnTo>
-                    <a:pt x="5658179" y="1678769"/>
-                  </a:lnTo>
-                  <a:lnTo>
-                    <a:pt x="5586557" y="1674373"/>
-                  </a:lnTo>
-                  <a:lnTo>
-                    <a:pt x="5514934" y="1669949"/>
-                  </a:lnTo>
-                  <a:lnTo>
-                    <a:pt x="5443311" y="1665497"/>
-                  </a:lnTo>
-                  <a:lnTo>
-                    <a:pt x="5371689" y="1661015"/>
-                  </a:lnTo>
-                  <a:lnTo>
-                    <a:pt x="5300066" y="1656504"/>
-                  </a:lnTo>
-                  <a:lnTo>
-                    <a:pt x="5228444" y="1651965"/>
-                  </a:lnTo>
-                  <a:lnTo>
-                    <a:pt x="5156821" y="1647395"/>
-                  </a:lnTo>
-                  <a:lnTo>
-                    <a:pt x="5085199" y="1642796"/>
-                  </a:lnTo>
-                  <a:lnTo>
-                    <a:pt x="5013576" y="1638167"/>
-                  </a:lnTo>
-                  <a:lnTo>
-                    <a:pt x="4941954" y="1633508"/>
-                  </a:lnTo>
-                  <a:lnTo>
-                    <a:pt x="4870331" y="1628819"/>
-                  </a:lnTo>
-                  <a:lnTo>
-                    <a:pt x="4798709" y="1624100"/>
-                  </a:lnTo>
-                  <a:lnTo>
-                    <a:pt x="4727086" y="1619350"/>
-                  </a:lnTo>
-                  <a:lnTo>
-                    <a:pt x="4655464" y="1614569"/>
-                  </a:lnTo>
-                  <a:lnTo>
-                    <a:pt x="4583841" y="1609757"/>
-                  </a:lnTo>
-                  <a:lnTo>
-                    <a:pt x="4512219" y="1604913"/>
-                  </a:lnTo>
-                  <a:lnTo>
-                    <a:pt x="4440596" y="1600039"/>
-                  </a:lnTo>
-                  <a:lnTo>
-                    <a:pt x="4368974" y="1595133"/>
-                  </a:lnTo>
-                  <a:lnTo>
-                    <a:pt x="4297351" y="1590194"/>
-                  </a:lnTo>
-                  <a:lnTo>
-                    <a:pt x="4225729" y="1585224"/>
-                  </a:lnTo>
-                  <a:lnTo>
-                    <a:pt x="4154106" y="1580222"/>
-                  </a:lnTo>
-                  <a:lnTo>
-                    <a:pt x="4082483" y="1575187"/>
-                  </a:lnTo>
-                  <a:lnTo>
-                    <a:pt x="4010861" y="1570120"/>
-                  </a:lnTo>
-                  <a:lnTo>
-                    <a:pt x="3939238" y="1565019"/>
-                  </a:lnTo>
-                  <a:lnTo>
-                    <a:pt x="3867616" y="1559886"/>
-                  </a:lnTo>
-                  <a:lnTo>
-                    <a:pt x="3795993" y="1554719"/>
-                  </a:lnTo>
-                  <a:lnTo>
-                    <a:pt x="3724371" y="1549519"/>
-                  </a:lnTo>
-                  <a:lnTo>
-                    <a:pt x="3652748" y="1544285"/>
-                  </a:lnTo>
-                  <a:lnTo>
-                    <a:pt x="3581126" y="1539017"/>
-                  </a:lnTo>
-                  <a:lnTo>
-                    <a:pt x="3509503" y="1533714"/>
-                  </a:lnTo>
-                  <a:lnTo>
-                    <a:pt x="3437881" y="1528378"/>
-                  </a:lnTo>
-                  <a:lnTo>
-                    <a:pt x="3366258" y="1538412"/>
-                  </a:lnTo>
-                  <a:lnTo>
-                    <a:pt x="3294636" y="1554886"/>
-                  </a:lnTo>
-                  <a:lnTo>
-                    <a:pt x="3223013" y="1571028"/>
-                  </a:lnTo>
-                  <a:lnTo>
-                    <a:pt x="3151391" y="1586845"/>
-                  </a:lnTo>
-                  <a:lnTo>
-                    <a:pt x="3079768" y="1602343"/>
-                  </a:lnTo>
-                  <a:lnTo>
-                    <a:pt x="3008146" y="1617529"/>
-                  </a:lnTo>
-                  <a:lnTo>
-                    <a:pt x="2936523" y="1632410"/>
-                  </a:lnTo>
-                  <a:lnTo>
-                    <a:pt x="2864901" y="1646990"/>
-                  </a:lnTo>
-                  <a:lnTo>
-                    <a:pt x="2793278" y="1661277"/>
-                  </a:lnTo>
-                  <a:lnTo>
-                    <a:pt x="2721655" y="1675276"/>
-                  </a:lnTo>
-                  <a:lnTo>
-                    <a:pt x="2650033" y="1688992"/>
-                  </a:lnTo>
-                  <a:lnTo>
-                    <a:pt x="2578410" y="1702433"/>
-                  </a:lnTo>
-                  <a:lnTo>
-                    <a:pt x="2506788" y="1715603"/>
-                  </a:lnTo>
-                  <a:lnTo>
-                    <a:pt x="2435165" y="1728508"/>
-                  </a:lnTo>
-                  <a:lnTo>
-                    <a:pt x="2363543" y="1741152"/>
-                  </a:lnTo>
-                  <a:lnTo>
-                    <a:pt x="2291920" y="1753542"/>
-                  </a:lnTo>
-                  <a:lnTo>
-                    <a:pt x="2220298" y="1765682"/>
-                  </a:lnTo>
-                  <a:lnTo>
-                    <a:pt x="2148675" y="1777578"/>
-                  </a:lnTo>
-                  <a:lnTo>
-                    <a:pt x="2077053" y="1789234"/>
-                  </a:lnTo>
-                  <a:lnTo>
-                    <a:pt x="2005430" y="1800655"/>
-                  </a:lnTo>
-                  <a:lnTo>
-                    <a:pt x="1933808" y="1811847"/>
-                  </a:lnTo>
-                  <a:lnTo>
-                    <a:pt x="1862185" y="1822813"/>
-                  </a:lnTo>
-                  <a:lnTo>
-                    <a:pt x="1790563" y="1833557"/>
-                  </a:lnTo>
-                  <a:lnTo>
-                    <a:pt x="1718940" y="1844086"/>
-                  </a:lnTo>
-                  <a:lnTo>
-                    <a:pt x="1647318" y="1854402"/>
-                  </a:lnTo>
-                  <a:lnTo>
-                    <a:pt x="1575695" y="1864511"/>
-                  </a:lnTo>
-                  <a:lnTo>
-                    <a:pt x="1504073" y="1874416"/>
-                  </a:lnTo>
-                  <a:lnTo>
-                    <a:pt x="1432450" y="1884121"/>
-                  </a:lnTo>
-                  <a:lnTo>
-                    <a:pt x="1360827" y="1893631"/>
-                  </a:lnTo>
-                  <a:lnTo>
-                    <a:pt x="1289205" y="1902949"/>
-                  </a:lnTo>
-                  <a:lnTo>
-                    <a:pt x="1217582" y="1912080"/>
-                  </a:lnTo>
-                  <a:lnTo>
-                    <a:pt x="1145960" y="1921027"/>
-                  </a:lnTo>
-                  <a:lnTo>
-                    <a:pt x="1074337" y="1929793"/>
-                  </a:lnTo>
-                  <a:lnTo>
-                    <a:pt x="1002715" y="1938383"/>
-                  </a:lnTo>
-                  <a:lnTo>
-                    <a:pt x="931092" y="1946800"/>
-                  </a:lnTo>
-                  <a:lnTo>
-                    <a:pt x="859470" y="1955047"/>
-                  </a:lnTo>
-                  <a:lnTo>
-                    <a:pt x="787847" y="1963128"/>
-                  </a:lnTo>
-                  <a:lnTo>
-                    <a:pt x="716225" y="1971047"/>
-                  </a:lnTo>
-                  <a:lnTo>
-                    <a:pt x="644602" y="1978805"/>
-                  </a:lnTo>
-                  <a:lnTo>
-                    <a:pt x="572980" y="1986408"/>
-                  </a:lnTo>
-                  <a:lnTo>
-                    <a:pt x="501357" y="1993857"/>
-                  </a:lnTo>
-                  <a:lnTo>
-                    <a:pt x="429735" y="2001157"/>
-                  </a:lnTo>
-                  <a:lnTo>
-                    <a:pt x="358112" y="2008309"/>
-                  </a:lnTo>
-                  <a:lnTo>
-                    <a:pt x="286490" y="2015317"/>
-                  </a:lnTo>
-                  <a:lnTo>
-                    <a:pt x="214867" y="2022184"/>
-                  </a:lnTo>
-                  <a:lnTo>
-                    <a:pt x="143245" y="2028913"/>
-                  </a:lnTo>
-                  <a:lnTo>
-                    <a:pt x="71622" y="2035506"/>
-                  </a:lnTo>
-                  <a:lnTo>
-                    <a:pt x="0" y="2041967"/>
+                    <a:pt x="7090630" y="1760420"/>
+                  </a:lnTo>
+                  <a:lnTo>
+                    <a:pt x="7019007" y="1756548"/>
+                  </a:lnTo>
+                  <a:lnTo>
+                    <a:pt x="6947385" y="1752650"/>
+                  </a:lnTo>
+                  <a:lnTo>
+                    <a:pt x="6875762" y="1748728"/>
+                  </a:lnTo>
+                  <a:lnTo>
+                    <a:pt x="6804139" y="1744779"/>
+                  </a:lnTo>
+                  <a:lnTo>
+                    <a:pt x="6732517" y="1740805"/>
+                  </a:lnTo>
+                  <a:lnTo>
+                    <a:pt x="6660894" y="1736805"/>
+                  </a:lnTo>
+                  <a:lnTo>
+                    <a:pt x="6589272" y="1732779"/>
+                  </a:lnTo>
+                  <a:lnTo>
+                    <a:pt x="6517649" y="1728727"/>
+                  </a:lnTo>
+                  <a:lnTo>
+                    <a:pt x="6446027" y="1724648"/>
+                  </a:lnTo>
+                  <a:lnTo>
+                    <a:pt x="6374404" y="1720543"/>
+                  </a:lnTo>
+                  <a:lnTo>
+                    <a:pt x="6302782" y="1716411"/>
+                  </a:lnTo>
+                  <a:lnTo>
+                    <a:pt x="6231159" y="1712252"/>
+                  </a:lnTo>
+                  <a:lnTo>
+                    <a:pt x="6159537" y="1708066"/>
+                  </a:lnTo>
+                  <a:lnTo>
+                    <a:pt x="6087914" y="1703853"/>
+                  </a:lnTo>
+                  <a:lnTo>
+                    <a:pt x="6016292" y="1699612"/>
+                  </a:lnTo>
+                  <a:lnTo>
+                    <a:pt x="5944669" y="1695344"/>
+                  </a:lnTo>
+                  <a:lnTo>
+                    <a:pt x="5873047" y="1691048"/>
+                  </a:lnTo>
+                  <a:lnTo>
+                    <a:pt x="5801424" y="1686724"/>
+                  </a:lnTo>
+                  <a:lnTo>
+                    <a:pt x="5729802" y="1682371"/>
+                  </a:lnTo>
+                  <a:lnTo>
+                    <a:pt x="5658179" y="1677991"/>
+                  </a:lnTo>
+                  <a:lnTo>
+                    <a:pt x="5586557" y="1673582"/>
+                  </a:lnTo>
+                  <a:lnTo>
+                    <a:pt x="5514934" y="1669144"/>
+                  </a:lnTo>
+                  <a:lnTo>
+                    <a:pt x="5443311" y="1664677"/>
+                  </a:lnTo>
+                  <a:lnTo>
+                    <a:pt x="5371689" y="1660181"/>
+                  </a:lnTo>
+                  <a:lnTo>
+                    <a:pt x="5300066" y="1655656"/>
+                  </a:lnTo>
+                  <a:lnTo>
+                    <a:pt x="5228444" y="1651101"/>
+                  </a:lnTo>
+                  <a:lnTo>
+                    <a:pt x="5156821" y="1646517"/>
+                  </a:lnTo>
+                  <a:lnTo>
+                    <a:pt x="5085199" y="1641903"/>
+                  </a:lnTo>
+                  <a:lnTo>
+                    <a:pt x="5013576" y="1637259"/>
+                  </a:lnTo>
+                  <a:lnTo>
+                    <a:pt x="4941954" y="1632584"/>
+                  </a:lnTo>
+                  <a:lnTo>
+                    <a:pt x="4870331" y="1627879"/>
+                  </a:lnTo>
+                  <a:lnTo>
+                    <a:pt x="4798709" y="1623144"/>
+                  </a:lnTo>
+                  <a:lnTo>
+                    <a:pt x="4727086" y="1618377"/>
+                  </a:lnTo>
+                  <a:lnTo>
+                    <a:pt x="4655464" y="1613580"/>
+                  </a:lnTo>
+                  <a:lnTo>
+                    <a:pt x="4583841" y="1608751"/>
+                  </a:lnTo>
+                  <a:lnTo>
+                    <a:pt x="4512219" y="1603891"/>
+                  </a:lnTo>
+                  <a:lnTo>
+                    <a:pt x="4440596" y="1598999"/>
+                  </a:lnTo>
+                  <a:lnTo>
+                    <a:pt x="4368974" y="1594076"/>
+                  </a:lnTo>
+                  <a:lnTo>
+                    <a:pt x="4297351" y="1589120"/>
+                  </a:lnTo>
+                  <a:lnTo>
+                    <a:pt x="4225729" y="1584132"/>
+                  </a:lnTo>
+                  <a:lnTo>
+                    <a:pt x="4154106" y="1579111"/>
+                  </a:lnTo>
+                  <a:lnTo>
+                    <a:pt x="4082483" y="1574058"/>
+                  </a:lnTo>
+                  <a:lnTo>
+                    <a:pt x="4010861" y="1568972"/>
+                  </a:lnTo>
+                  <a:lnTo>
+                    <a:pt x="3939238" y="1563853"/>
+                  </a:lnTo>
+                  <a:lnTo>
+                    <a:pt x="3867616" y="1558700"/>
+                  </a:lnTo>
+                  <a:lnTo>
+                    <a:pt x="3795993" y="1553514"/>
+                  </a:lnTo>
+                  <a:lnTo>
+                    <a:pt x="3724371" y="1548294"/>
+                  </a:lnTo>
+                  <a:lnTo>
+                    <a:pt x="3652748" y="1543040"/>
+                  </a:lnTo>
+                  <a:lnTo>
+                    <a:pt x="3581126" y="1537752"/>
+                  </a:lnTo>
+                  <a:lnTo>
+                    <a:pt x="3509503" y="1532429"/>
+                  </a:lnTo>
+                  <a:lnTo>
+                    <a:pt x="3437881" y="1527072"/>
+                  </a:lnTo>
+                  <a:lnTo>
+                    <a:pt x="3366258" y="1537094"/>
+                  </a:lnTo>
+                  <a:lnTo>
+                    <a:pt x="3294636" y="1553559"/>
+                  </a:lnTo>
+                  <a:lnTo>
+                    <a:pt x="3223013" y="1569693"/>
+                  </a:lnTo>
+                  <a:lnTo>
+                    <a:pt x="3151391" y="1585502"/>
+                  </a:lnTo>
+                  <a:lnTo>
+                    <a:pt x="3079768" y="1600993"/>
+                  </a:lnTo>
+                  <a:lnTo>
+                    <a:pt x="3008146" y="1616172"/>
+                  </a:lnTo>
+                  <a:lnTo>
+                    <a:pt x="2936523" y="1631045"/>
+                  </a:lnTo>
+                  <a:lnTo>
+                    <a:pt x="2864901" y="1645619"/>
+                  </a:lnTo>
+                  <a:lnTo>
+                    <a:pt x="2793278" y="1659899"/>
+                  </a:lnTo>
+                  <a:lnTo>
+                    <a:pt x="2721655" y="1673892"/>
+                  </a:lnTo>
+                  <a:lnTo>
+                    <a:pt x="2650033" y="1687603"/>
+                  </a:lnTo>
+                  <a:lnTo>
+                    <a:pt x="2578410" y="1701038"/>
+                  </a:lnTo>
+                  <a:lnTo>
+                    <a:pt x="2506788" y="1714203"/>
+                  </a:lnTo>
+                  <a:lnTo>
+                    <a:pt x="2435165" y="1727102"/>
+                  </a:lnTo>
+                  <a:lnTo>
+                    <a:pt x="2363543" y="1739742"/>
+                  </a:lnTo>
+                  <a:lnTo>
+                    <a:pt x="2291920" y="1752127"/>
+                  </a:lnTo>
+                  <a:lnTo>
+                    <a:pt x="2220298" y="1764263"/>
+                  </a:lnTo>
+                  <a:lnTo>
+                    <a:pt x="2148675" y="1776155"/>
+                  </a:lnTo>
+                  <a:lnTo>
+                    <a:pt x="2077053" y="1787807"/>
+                  </a:lnTo>
+                  <a:lnTo>
+                    <a:pt x="2005430" y="1799225"/>
+                  </a:lnTo>
+                  <a:lnTo>
+                    <a:pt x="1933808" y="1810413"/>
+                  </a:lnTo>
+                  <a:lnTo>
+                    <a:pt x="1862185" y="1821375"/>
+                  </a:lnTo>
+                  <a:lnTo>
+                    <a:pt x="1790563" y="1832117"/>
+                  </a:lnTo>
+                  <a:lnTo>
+                    <a:pt x="1718940" y="1842642"/>
+                  </a:lnTo>
+                  <a:lnTo>
+                    <a:pt x="1647318" y="1852956"/>
+                  </a:lnTo>
+                  <a:lnTo>
+                    <a:pt x="1575695" y="1863062"/>
+                  </a:lnTo>
+                  <a:lnTo>
+                    <a:pt x="1504073" y="1872964"/>
+                  </a:lnTo>
+                  <a:lnTo>
+                    <a:pt x="1432450" y="1882667"/>
+                  </a:lnTo>
+                  <a:lnTo>
+                    <a:pt x="1360827" y="1892175"/>
+                  </a:lnTo>
+                  <a:lnTo>
+                    <a:pt x="1289205" y="1901491"/>
+                  </a:lnTo>
+                  <a:lnTo>
+                    <a:pt x="1217582" y="1910620"/>
+                  </a:lnTo>
+                  <a:lnTo>
+                    <a:pt x="1145960" y="1919565"/>
+                  </a:lnTo>
+                  <a:lnTo>
+                    <a:pt x="1074337" y="1928330"/>
+                  </a:lnTo>
+                  <a:lnTo>
+                    <a:pt x="1002715" y="1936918"/>
+                  </a:lnTo>
+                  <a:lnTo>
+                    <a:pt x="931092" y="1945334"/>
+                  </a:lnTo>
+                  <a:lnTo>
+                    <a:pt x="859470" y="1953580"/>
+                  </a:lnTo>
+                  <a:lnTo>
+                    <a:pt x="787847" y="1961660"/>
+                  </a:lnTo>
+                  <a:lnTo>
+                    <a:pt x="716225" y="1969577"/>
+                  </a:lnTo>
+                  <a:lnTo>
+                    <a:pt x="644602" y="1977335"/>
+                  </a:lnTo>
+                  <a:lnTo>
+                    <a:pt x="572980" y="1984937"/>
+                  </a:lnTo>
+                  <a:lnTo>
+                    <a:pt x="501357" y="1992385"/>
+                  </a:lnTo>
+                  <a:lnTo>
+                    <a:pt x="429735" y="1999684"/>
+                  </a:lnTo>
+                  <a:lnTo>
+                    <a:pt x="358112" y="2006836"/>
+                  </a:lnTo>
+                  <a:lnTo>
+                    <a:pt x="286490" y="2013844"/>
+                  </a:lnTo>
+                  <a:lnTo>
+                    <a:pt x="214867" y="2020710"/>
+                  </a:lnTo>
+                  <a:lnTo>
+                    <a:pt x="143245" y="2027439"/>
+                  </a:lnTo>
+                  <a:lnTo>
+                    <a:pt x="71622" y="2034032"/>
+                  </a:lnTo>
+                  <a:lnTo>
+                    <a:pt x="0" y="2040492"/>
                   </a:lnTo>
                   <a:close/>
                 </a:path>
@@ -4063,309 +4063,309 @@
           </p:nvSpPr>
           <p:spPr>
             <a:xfrm>
-              <a:off x="1172049" y="3201037"/>
-              <a:ext cx="7090630" cy="1523006"/>
+              <a:off x="1172049" y="3202349"/>
+              <a:ext cx="7090630" cy="1521680"/>
             </a:xfrm>
             <a:custGeom>
               <a:avLst/>
               <a:pathLst>
-                <a:path w="7090630" h="1523006">
+                <a:path w="7090630" h="1521680">
                   <a:moveTo>
-                    <a:pt x="0" y="1227035"/>
+                    <a:pt x="0" y="1224365"/>
                   </a:moveTo>
                   <a:lnTo>
-                    <a:pt x="71622" y="1234314"/>
-                  </a:lnTo>
-                  <a:lnTo>
-                    <a:pt x="143245" y="1241546"/>
-                  </a:lnTo>
-                  <a:lnTo>
-                    <a:pt x="214867" y="1248732"/>
-                  </a:lnTo>
-                  <a:lnTo>
-                    <a:pt x="286490" y="1255871"/>
-                  </a:lnTo>
-                  <a:lnTo>
-                    <a:pt x="358112" y="1262964"/>
-                  </a:lnTo>
-                  <a:lnTo>
-                    <a:pt x="429735" y="1270012"/>
-                  </a:lnTo>
-                  <a:lnTo>
-                    <a:pt x="501357" y="1277014"/>
-                  </a:lnTo>
-                  <a:lnTo>
-                    <a:pt x="572980" y="1283971"/>
-                  </a:lnTo>
-                  <a:lnTo>
-                    <a:pt x="644602" y="1290883"/>
-                  </a:lnTo>
-                  <a:lnTo>
-                    <a:pt x="716225" y="1297751"/>
-                  </a:lnTo>
-                  <a:lnTo>
-                    <a:pt x="787847" y="1304574"/>
-                  </a:lnTo>
-                  <a:lnTo>
-                    <a:pt x="859470" y="1311353"/>
-                  </a:lnTo>
-                  <a:lnTo>
-                    <a:pt x="931092" y="1318089"/>
-                  </a:lnTo>
-                  <a:lnTo>
-                    <a:pt x="1002715" y="1324781"/>
-                  </a:lnTo>
-                  <a:lnTo>
-                    <a:pt x="1074337" y="1331430"/>
-                  </a:lnTo>
-                  <a:lnTo>
-                    <a:pt x="1145960" y="1338037"/>
-                  </a:lnTo>
-                  <a:lnTo>
-                    <a:pt x="1217582" y="1344600"/>
-                  </a:lnTo>
-                  <a:lnTo>
-                    <a:pt x="1289205" y="1351122"/>
-                  </a:lnTo>
-                  <a:lnTo>
-                    <a:pt x="1360827" y="1357601"/>
-                  </a:lnTo>
-                  <a:lnTo>
-                    <a:pt x="1432450" y="1364038"/>
-                  </a:lnTo>
-                  <a:lnTo>
-                    <a:pt x="1504073" y="1370434"/>
-                  </a:lnTo>
-                  <a:lnTo>
-                    <a:pt x="1575695" y="1376789"/>
-                  </a:lnTo>
-                  <a:lnTo>
-                    <a:pt x="1647318" y="1383103"/>
-                  </a:lnTo>
-                  <a:lnTo>
-                    <a:pt x="1718940" y="1389376"/>
-                  </a:lnTo>
-                  <a:lnTo>
-                    <a:pt x="1790563" y="1395609"/>
-                  </a:lnTo>
-                  <a:lnTo>
-                    <a:pt x="1862185" y="1401801"/>
-                  </a:lnTo>
-                  <a:lnTo>
-                    <a:pt x="1933808" y="1407954"/>
-                  </a:lnTo>
-                  <a:lnTo>
-                    <a:pt x="2005430" y="1414067"/>
-                  </a:lnTo>
-                  <a:lnTo>
-                    <a:pt x="2077053" y="1420140"/>
-                  </a:lnTo>
-                  <a:lnTo>
-                    <a:pt x="2148675" y="1426175"/>
-                  </a:lnTo>
-                  <a:lnTo>
-                    <a:pt x="2220298" y="1432170"/>
-                  </a:lnTo>
-                  <a:lnTo>
-                    <a:pt x="2291920" y="1438127"/>
-                  </a:lnTo>
-                  <a:lnTo>
-                    <a:pt x="2363543" y="1444045"/>
-                  </a:lnTo>
-                  <a:lnTo>
-                    <a:pt x="2435165" y="1449925"/>
-                  </a:lnTo>
-                  <a:lnTo>
-                    <a:pt x="2506788" y="1455768"/>
-                  </a:lnTo>
-                  <a:lnTo>
-                    <a:pt x="2578410" y="1461572"/>
-                  </a:lnTo>
-                  <a:lnTo>
-                    <a:pt x="2650033" y="1467340"/>
-                  </a:lnTo>
-                  <a:lnTo>
-                    <a:pt x="2721655" y="1473070"/>
-                  </a:lnTo>
-                  <a:lnTo>
-                    <a:pt x="2793278" y="1478763"/>
-                  </a:lnTo>
-                  <a:lnTo>
-                    <a:pt x="2864901" y="1484419"/>
-                  </a:lnTo>
-                  <a:lnTo>
-                    <a:pt x="2936523" y="1490039"/>
-                  </a:lnTo>
-                  <a:lnTo>
-                    <a:pt x="3008146" y="1495623"/>
-                  </a:lnTo>
-                  <a:lnTo>
-                    <a:pt x="3079768" y="1501171"/>
-                  </a:lnTo>
-                  <a:lnTo>
-                    <a:pt x="3151391" y="1506683"/>
-                  </a:lnTo>
-                  <a:lnTo>
-                    <a:pt x="3223013" y="1512159"/>
-                  </a:lnTo>
-                  <a:lnTo>
-                    <a:pt x="3294636" y="1517600"/>
-                  </a:lnTo>
-                  <a:lnTo>
-                    <a:pt x="3366258" y="1523006"/>
-                  </a:lnTo>
-                  <a:lnTo>
-                    <a:pt x="3437881" y="1521599"/>
-                  </a:lnTo>
-                  <a:lnTo>
-                    <a:pt x="3509503" y="1504441"/>
-                  </a:lnTo>
-                  <a:lnTo>
-                    <a:pt x="3581126" y="1486930"/>
-                  </a:lnTo>
-                  <a:lnTo>
-                    <a:pt x="3652748" y="1469059"/>
-                  </a:lnTo>
-                  <a:lnTo>
-                    <a:pt x="3724371" y="1450821"/>
-                  </a:lnTo>
-                  <a:lnTo>
-                    <a:pt x="3795993" y="1432208"/>
-                  </a:lnTo>
-                  <a:lnTo>
-                    <a:pt x="3867616" y="1413212"/>
-                  </a:lnTo>
-                  <a:lnTo>
-                    <a:pt x="3939238" y="1393825"/>
-                  </a:lnTo>
-                  <a:lnTo>
-                    <a:pt x="4010861" y="1374040"/>
-                  </a:lnTo>
-                  <a:lnTo>
-                    <a:pt x="4082483" y="1353848"/>
-                  </a:lnTo>
-                  <a:lnTo>
-                    <a:pt x="4154106" y="1333241"/>
-                  </a:lnTo>
-                  <a:lnTo>
-                    <a:pt x="4225729" y="1312211"/>
-                  </a:lnTo>
-                  <a:lnTo>
-                    <a:pt x="4297351" y="1290748"/>
-                  </a:lnTo>
-                  <a:lnTo>
-                    <a:pt x="4368974" y="1268844"/>
-                  </a:lnTo>
-                  <a:lnTo>
-                    <a:pt x="4440596" y="1246489"/>
-                  </a:lnTo>
-                  <a:lnTo>
-                    <a:pt x="4512219" y="1223675"/>
-                  </a:lnTo>
-                  <a:lnTo>
-                    <a:pt x="4583841" y="1200392"/>
-                  </a:lnTo>
-                  <a:lnTo>
-                    <a:pt x="4655464" y="1176630"/>
-                  </a:lnTo>
-                  <a:lnTo>
-                    <a:pt x="4727086" y="1152380"/>
-                  </a:lnTo>
-                  <a:lnTo>
-                    <a:pt x="4798709" y="1127631"/>
-                  </a:lnTo>
-                  <a:lnTo>
-                    <a:pt x="4870331" y="1102374"/>
-                  </a:lnTo>
-                  <a:lnTo>
-                    <a:pt x="4941954" y="1076597"/>
-                  </a:lnTo>
-                  <a:lnTo>
-                    <a:pt x="5013576" y="1050290"/>
-                  </a:lnTo>
-                  <a:lnTo>
-                    <a:pt x="5085199" y="1023442"/>
-                  </a:lnTo>
-                  <a:lnTo>
-                    <a:pt x="5156821" y="996043"/>
-                  </a:lnTo>
-                  <a:lnTo>
-                    <a:pt x="5228444" y="968080"/>
-                  </a:lnTo>
-                  <a:lnTo>
-                    <a:pt x="5300066" y="939542"/>
-                  </a:lnTo>
-                  <a:lnTo>
-                    <a:pt x="5371689" y="910418"/>
-                  </a:lnTo>
-                  <a:lnTo>
-                    <a:pt x="5443311" y="880695"/>
-                  </a:lnTo>
-                  <a:lnTo>
-                    <a:pt x="5514934" y="850361"/>
-                  </a:lnTo>
-                  <a:lnTo>
-                    <a:pt x="5586557" y="819403"/>
-                  </a:lnTo>
-                  <a:lnTo>
-                    <a:pt x="5658179" y="787809"/>
-                  </a:lnTo>
-                  <a:lnTo>
-                    <a:pt x="5729802" y="755565"/>
-                  </a:lnTo>
-                  <a:lnTo>
-                    <a:pt x="5801424" y="722658"/>
-                  </a:lnTo>
-                  <a:lnTo>
-                    <a:pt x="5873047" y="689075"/>
-                  </a:lnTo>
-                  <a:lnTo>
-                    <a:pt x="5944669" y="654802"/>
-                  </a:lnTo>
-                  <a:lnTo>
-                    <a:pt x="6016292" y="619823"/>
-                  </a:lnTo>
-                  <a:lnTo>
-                    <a:pt x="6087914" y="584126"/>
-                  </a:lnTo>
-                  <a:lnTo>
-                    <a:pt x="6159537" y="547695"/>
-                  </a:lnTo>
-                  <a:lnTo>
-                    <a:pt x="6231159" y="510515"/>
-                  </a:lnTo>
-                  <a:lnTo>
-                    <a:pt x="6302782" y="472570"/>
-                  </a:lnTo>
-                  <a:lnTo>
-                    <a:pt x="6374404" y="433846"/>
-                  </a:lnTo>
-                  <a:lnTo>
-                    <a:pt x="6446027" y="394325"/>
-                  </a:lnTo>
-                  <a:lnTo>
-                    <a:pt x="6517649" y="353992"/>
-                  </a:lnTo>
-                  <a:lnTo>
-                    <a:pt x="6589272" y="312830"/>
-                  </a:lnTo>
-                  <a:lnTo>
-                    <a:pt x="6660894" y="270821"/>
-                  </a:lnTo>
-                  <a:lnTo>
-                    <a:pt x="6732517" y="227949"/>
-                  </a:lnTo>
-                  <a:lnTo>
-                    <a:pt x="6804139" y="184196"/>
-                  </a:lnTo>
-                  <a:lnTo>
-                    <a:pt x="6875762" y="139542"/>
-                  </a:lnTo>
-                  <a:lnTo>
-                    <a:pt x="6947385" y="93971"/>
-                  </a:lnTo>
-                  <a:lnTo>
-                    <a:pt x="7019007" y="47464"/>
+                    <a:pt x="71622" y="1231682"/>
+                  </a:lnTo>
+                  <a:lnTo>
+                    <a:pt x="143245" y="1238950"/>
+                  </a:lnTo>
+                  <a:lnTo>
+                    <a:pt x="214867" y="1246172"/>
+                  </a:lnTo>
+                  <a:lnTo>
+                    <a:pt x="286490" y="1253347"/>
+                  </a:lnTo>
+                  <a:lnTo>
+                    <a:pt x="358112" y="1260476"/>
+                  </a:lnTo>
+                  <a:lnTo>
+                    <a:pt x="429735" y="1267559"/>
+                  </a:lnTo>
+                  <a:lnTo>
+                    <a:pt x="501357" y="1274595"/>
+                  </a:lnTo>
+                  <a:lnTo>
+                    <a:pt x="572980" y="1281587"/>
+                  </a:lnTo>
+                  <a:lnTo>
+                    <a:pt x="644602" y="1288532"/>
+                  </a:lnTo>
+                  <a:lnTo>
+                    <a:pt x="716225" y="1295433"/>
+                  </a:lnTo>
+                  <a:lnTo>
+                    <a:pt x="787847" y="1302290"/>
+                  </a:lnTo>
+                  <a:lnTo>
+                    <a:pt x="859470" y="1309102"/>
+                  </a:lnTo>
+                  <a:lnTo>
+                    <a:pt x="931092" y="1315870"/>
+                  </a:lnTo>
+                  <a:lnTo>
+                    <a:pt x="1002715" y="1322594"/>
+                  </a:lnTo>
+                  <a:lnTo>
+                    <a:pt x="1074337" y="1329274"/>
+                  </a:lnTo>
+                  <a:lnTo>
+                    <a:pt x="1145960" y="1335912"/>
+                  </a:lnTo>
+                  <a:lnTo>
+                    <a:pt x="1217582" y="1342506"/>
+                  </a:lnTo>
+                  <a:lnTo>
+                    <a:pt x="1289205" y="1349058"/>
+                  </a:lnTo>
+                  <a:lnTo>
+                    <a:pt x="1360827" y="1355567"/>
+                  </a:lnTo>
+                  <a:lnTo>
+                    <a:pt x="1432450" y="1362034"/>
+                  </a:lnTo>
+                  <a:lnTo>
+                    <a:pt x="1504073" y="1368459"/>
+                  </a:lnTo>
+                  <a:lnTo>
+                    <a:pt x="1575695" y="1374843"/>
+                  </a:lnTo>
+                  <a:lnTo>
+                    <a:pt x="1647318" y="1381186"/>
+                  </a:lnTo>
+                  <a:lnTo>
+                    <a:pt x="1718940" y="1387487"/>
+                  </a:lnTo>
+                  <a:lnTo>
+                    <a:pt x="1790563" y="1393748"/>
+                  </a:lnTo>
+                  <a:lnTo>
+                    <a:pt x="1862185" y="1399968"/>
+                  </a:lnTo>
+                  <a:lnTo>
+                    <a:pt x="1933808" y="1406147"/>
+                  </a:lnTo>
+                  <a:lnTo>
+                    <a:pt x="2005430" y="1412287"/>
+                  </a:lnTo>
+                  <a:lnTo>
+                    <a:pt x="2077053" y="1418387"/>
+                  </a:lnTo>
+                  <a:lnTo>
+                    <a:pt x="2148675" y="1424448"/>
+                  </a:lnTo>
+                  <a:lnTo>
+                    <a:pt x="2220298" y="1430469"/>
+                  </a:lnTo>
+                  <a:lnTo>
+                    <a:pt x="2291920" y="1436452"/>
+                  </a:lnTo>
+                  <a:lnTo>
+                    <a:pt x="2363543" y="1442396"/>
+                  </a:lnTo>
+                  <a:lnTo>
+                    <a:pt x="2435165" y="1448301"/>
+                  </a:lnTo>
+                  <a:lnTo>
+                    <a:pt x="2506788" y="1454168"/>
+                  </a:lnTo>
+                  <a:lnTo>
+                    <a:pt x="2578410" y="1459997"/>
+                  </a:lnTo>
+                  <a:lnTo>
+                    <a:pt x="2650033" y="1465788"/>
+                  </a:lnTo>
+                  <a:lnTo>
+                    <a:pt x="2721655" y="1471542"/>
+                  </a:lnTo>
+                  <a:lnTo>
+                    <a:pt x="2793278" y="1477259"/>
+                  </a:lnTo>
+                  <a:lnTo>
+                    <a:pt x="2864901" y="1482938"/>
+                  </a:lnTo>
+                  <a:lnTo>
+                    <a:pt x="2936523" y="1488581"/>
+                  </a:lnTo>
+                  <a:lnTo>
+                    <a:pt x="3008146" y="1494188"/>
+                  </a:lnTo>
+                  <a:lnTo>
+                    <a:pt x="3079768" y="1499758"/>
+                  </a:lnTo>
+                  <a:lnTo>
+                    <a:pt x="3151391" y="1505292"/>
+                  </a:lnTo>
+                  <a:lnTo>
+                    <a:pt x="3223013" y="1510790"/>
+                  </a:lnTo>
+                  <a:lnTo>
+                    <a:pt x="3294636" y="1516253"/>
+                  </a:lnTo>
+                  <a:lnTo>
+                    <a:pt x="3366258" y="1521680"/>
+                  </a:lnTo>
+                  <a:lnTo>
+                    <a:pt x="3437881" y="1520290"/>
+                  </a:lnTo>
+                  <a:lnTo>
+                    <a:pt x="3509503" y="1503141"/>
+                  </a:lnTo>
+                  <a:lnTo>
+                    <a:pt x="3581126" y="1485640"/>
+                  </a:lnTo>
+                  <a:lnTo>
+                    <a:pt x="3652748" y="1467779"/>
+                  </a:lnTo>
+                  <a:lnTo>
+                    <a:pt x="3724371" y="1449551"/>
+                  </a:lnTo>
+                  <a:lnTo>
+                    <a:pt x="3795993" y="1430949"/>
+                  </a:lnTo>
+                  <a:lnTo>
+                    <a:pt x="3867616" y="1411964"/>
+                  </a:lnTo>
+                  <a:lnTo>
+                    <a:pt x="3939238" y="1392589"/>
+                  </a:lnTo>
+                  <a:lnTo>
+                    <a:pt x="4010861" y="1372817"/>
+                  </a:lnTo>
+                  <a:lnTo>
+                    <a:pt x="4082483" y="1352637"/>
+                  </a:lnTo>
+                  <a:lnTo>
+                    <a:pt x="4154106" y="1332044"/>
+                  </a:lnTo>
+                  <a:lnTo>
+                    <a:pt x="4225729" y="1311027"/>
+                  </a:lnTo>
+                  <a:lnTo>
+                    <a:pt x="4297351" y="1289578"/>
+                  </a:lnTo>
+                  <a:lnTo>
+                    <a:pt x="4368974" y="1267689"/>
+                  </a:lnTo>
+                  <a:lnTo>
+                    <a:pt x="4440596" y="1245349"/>
+                  </a:lnTo>
+                  <a:lnTo>
+                    <a:pt x="4512219" y="1222551"/>
+                  </a:lnTo>
+                  <a:lnTo>
+                    <a:pt x="4583841" y="1199285"/>
+                  </a:lnTo>
+                  <a:lnTo>
+                    <a:pt x="4655464" y="1175540"/>
+                  </a:lnTo>
+                  <a:lnTo>
+                    <a:pt x="4727086" y="1151307"/>
+                  </a:lnTo>
+                  <a:lnTo>
+                    <a:pt x="4798709" y="1126577"/>
+                  </a:lnTo>
+                  <a:lnTo>
+                    <a:pt x="4870331" y="1101338"/>
+                  </a:lnTo>
+                  <a:lnTo>
+                    <a:pt x="4941954" y="1075581"/>
+                  </a:lnTo>
+                  <a:lnTo>
+                    <a:pt x="5013576" y="1049294"/>
+                  </a:lnTo>
+                  <a:lnTo>
+                    <a:pt x="5085199" y="1022468"/>
+                  </a:lnTo>
+                  <a:lnTo>
+                    <a:pt x="5156821" y="995090"/>
+                  </a:lnTo>
+                  <a:lnTo>
+                    <a:pt x="5228444" y="967149"/>
+                  </a:lnTo>
+                  <a:lnTo>
+                    <a:pt x="5300066" y="938635"/>
+                  </a:lnTo>
+                  <a:lnTo>
+                    <a:pt x="5371689" y="909535"/>
+                  </a:lnTo>
+                  <a:lnTo>
+                    <a:pt x="5443311" y="879836"/>
+                  </a:lnTo>
+                  <a:lnTo>
+                    <a:pt x="5514934" y="849528"/>
+                  </a:lnTo>
+                  <a:lnTo>
+                    <a:pt x="5586557" y="818597"/>
+                  </a:lnTo>
+                  <a:lnTo>
+                    <a:pt x="5658179" y="787030"/>
+                  </a:lnTo>
+                  <a:lnTo>
+                    <a:pt x="5729802" y="754814"/>
+                  </a:lnTo>
+                  <a:lnTo>
+                    <a:pt x="5801424" y="721937"/>
+                  </a:lnTo>
+                  <a:lnTo>
+                    <a:pt x="5873047" y="688384"/>
+                  </a:lnTo>
+                  <a:lnTo>
+                    <a:pt x="5944669" y="654142"/>
+                  </a:lnTo>
+                  <a:lnTo>
+                    <a:pt x="6016292" y="619196"/>
+                  </a:lnTo>
+                  <a:lnTo>
+                    <a:pt x="6087914" y="583532"/>
+                  </a:lnTo>
+                  <a:lnTo>
+                    <a:pt x="6159537" y="547135"/>
+                  </a:lnTo>
+                  <a:lnTo>
+                    <a:pt x="6231159" y="509990"/>
+                  </a:lnTo>
+                  <a:lnTo>
+                    <a:pt x="6302782" y="472082"/>
+                  </a:lnTo>
+                  <a:lnTo>
+                    <a:pt x="6374404" y="433396"/>
+                  </a:lnTo>
+                  <a:lnTo>
+                    <a:pt x="6446027" y="393914"/>
+                  </a:lnTo>
+                  <a:lnTo>
+                    <a:pt x="6517649" y="353621"/>
+                  </a:lnTo>
+                  <a:lnTo>
+                    <a:pt x="6589272" y="312500"/>
+                  </a:lnTo>
+                  <a:lnTo>
+                    <a:pt x="6660894" y="270535"/>
+                  </a:lnTo>
+                  <a:lnTo>
+                    <a:pt x="6732517" y="227707"/>
+                  </a:lnTo>
+                  <a:lnTo>
+                    <a:pt x="6804139" y="183999"/>
+                  </a:lnTo>
+                  <a:lnTo>
+                    <a:pt x="6875762" y="139393"/>
+                  </a:lnTo>
+                  <a:lnTo>
+                    <a:pt x="6947385" y="93870"/>
+                  </a:lnTo>
+                  <a:lnTo>
+                    <a:pt x="7019007" y="47412"/>
                   </a:lnTo>
                   <a:lnTo>
                     <a:pt x="7090630" y="0"/>
@@ -4388,312 +4388,312 @@
           </p:nvSpPr>
           <p:spPr>
             <a:xfrm>
-              <a:off x="1172049" y="4729416"/>
-              <a:ext cx="7090630" cy="513588"/>
+              <a:off x="1172049" y="4729422"/>
+              <a:ext cx="7090630" cy="513419"/>
             </a:xfrm>
             <a:custGeom>
               <a:avLst/>
               <a:pathLst>
-                <a:path w="7090630" h="513588">
+                <a:path w="7090630" h="513419">
                   <a:moveTo>
-                    <a:pt x="7090630" y="232585"/>
+                    <a:pt x="7090630" y="233347"/>
                   </a:moveTo>
                   <a:lnTo>
-                    <a:pt x="7019007" y="228723"/>
-                  </a:lnTo>
-                  <a:lnTo>
-                    <a:pt x="6947385" y="224836"/>
-                  </a:lnTo>
-                  <a:lnTo>
-                    <a:pt x="6875762" y="220923"/>
-                  </a:lnTo>
-                  <a:lnTo>
-                    <a:pt x="6804139" y="216985"/>
-                  </a:lnTo>
-                  <a:lnTo>
-                    <a:pt x="6732517" y="213022"/>
-                  </a:lnTo>
-                  <a:lnTo>
-                    <a:pt x="6660894" y="209033"/>
-                  </a:lnTo>
-                  <a:lnTo>
-                    <a:pt x="6589272" y="205018"/>
-                  </a:lnTo>
-                  <a:lnTo>
-                    <a:pt x="6517649" y="200977"/>
-                  </a:lnTo>
-                  <a:lnTo>
-                    <a:pt x="6446027" y="196910"/>
-                  </a:lnTo>
-                  <a:lnTo>
-                    <a:pt x="6374404" y="192816"/>
-                  </a:lnTo>
-                  <a:lnTo>
-                    <a:pt x="6302782" y="188696"/>
-                  </a:lnTo>
-                  <a:lnTo>
-                    <a:pt x="6231159" y="184549"/>
-                  </a:lnTo>
-                  <a:lnTo>
-                    <a:pt x="6159537" y="180375"/>
-                  </a:lnTo>
-                  <a:lnTo>
-                    <a:pt x="6087914" y="176174"/>
-                  </a:lnTo>
-                  <a:lnTo>
-                    <a:pt x="6016292" y="171946"/>
-                  </a:lnTo>
-                  <a:lnTo>
-                    <a:pt x="5944669" y="167691"/>
-                  </a:lnTo>
-                  <a:lnTo>
-                    <a:pt x="5873047" y="163408"/>
-                  </a:lnTo>
-                  <a:lnTo>
-                    <a:pt x="5801424" y="159097"/>
-                  </a:lnTo>
-                  <a:lnTo>
-                    <a:pt x="5729802" y="154758"/>
-                  </a:lnTo>
-                  <a:lnTo>
-                    <a:pt x="5658179" y="150390"/>
-                  </a:lnTo>
-                  <a:lnTo>
-                    <a:pt x="5586557" y="145995"/>
-                  </a:lnTo>
-                  <a:lnTo>
-                    <a:pt x="5514934" y="141571"/>
-                  </a:lnTo>
-                  <a:lnTo>
-                    <a:pt x="5443311" y="137118"/>
-                  </a:lnTo>
-                  <a:lnTo>
-                    <a:pt x="5371689" y="132637"/>
-                  </a:lnTo>
-                  <a:lnTo>
-                    <a:pt x="5300066" y="128126"/>
-                  </a:lnTo>
-                  <a:lnTo>
-                    <a:pt x="5228444" y="123586"/>
-                  </a:lnTo>
-                  <a:lnTo>
-                    <a:pt x="5156821" y="119017"/>
-                  </a:lnTo>
-                  <a:lnTo>
-                    <a:pt x="5085199" y="114418"/>
-                  </a:lnTo>
-                  <a:lnTo>
-                    <a:pt x="5013576" y="109789"/>
-                  </a:lnTo>
-                  <a:lnTo>
-                    <a:pt x="4941954" y="105130"/>
-                  </a:lnTo>
-                  <a:lnTo>
-                    <a:pt x="4870331" y="100441"/>
-                  </a:lnTo>
-                  <a:lnTo>
-                    <a:pt x="4798709" y="95722"/>
-                  </a:lnTo>
-                  <a:lnTo>
-                    <a:pt x="4727086" y="90971"/>
-                  </a:lnTo>
-                  <a:lnTo>
-                    <a:pt x="4655464" y="86190"/>
-                  </a:lnTo>
-                  <a:lnTo>
-                    <a:pt x="4583841" y="81378"/>
-                  </a:lnTo>
-                  <a:lnTo>
-                    <a:pt x="4512219" y="76535"/>
-                  </a:lnTo>
-                  <a:lnTo>
-                    <a:pt x="4440596" y="71661"/>
-                  </a:lnTo>
-                  <a:lnTo>
-                    <a:pt x="4368974" y="66754"/>
-                  </a:lnTo>
-                  <a:lnTo>
-                    <a:pt x="4297351" y="61816"/>
-                  </a:lnTo>
-                  <a:lnTo>
-                    <a:pt x="4225729" y="56846"/>
-                  </a:lnTo>
-                  <a:lnTo>
-                    <a:pt x="4154106" y="51844"/>
-                  </a:lnTo>
-                  <a:lnTo>
-                    <a:pt x="4082483" y="46809"/>
-                  </a:lnTo>
-                  <a:lnTo>
-                    <a:pt x="4010861" y="41741"/>
-                  </a:lnTo>
-                  <a:lnTo>
-                    <a:pt x="3939238" y="36641"/>
-                  </a:lnTo>
-                  <a:lnTo>
-                    <a:pt x="3867616" y="31507"/>
-                  </a:lnTo>
-                  <a:lnTo>
-                    <a:pt x="3795993" y="26341"/>
-                  </a:lnTo>
-                  <a:lnTo>
-                    <a:pt x="3724371" y="21140"/>
-                  </a:lnTo>
-                  <a:lnTo>
-                    <a:pt x="3652748" y="15906"/>
-                  </a:lnTo>
-                  <a:lnTo>
-                    <a:pt x="3581126" y="10638"/>
-                  </a:lnTo>
-                  <a:lnTo>
-                    <a:pt x="3509503" y="5336"/>
+                    <a:pt x="7019007" y="229475"/>
+                  </a:lnTo>
+                  <a:lnTo>
+                    <a:pt x="6947385" y="225578"/>
+                  </a:lnTo>
+                  <a:lnTo>
+                    <a:pt x="6875762" y="221655"/>
+                  </a:lnTo>
+                  <a:lnTo>
+                    <a:pt x="6804139" y="217707"/>
+                  </a:lnTo>
+                  <a:lnTo>
+                    <a:pt x="6732517" y="213732"/>
+                  </a:lnTo>
+                  <a:lnTo>
+                    <a:pt x="6660894" y="209732"/>
+                  </a:lnTo>
+                  <a:lnTo>
+                    <a:pt x="6589272" y="205706"/>
+                  </a:lnTo>
+                  <a:lnTo>
+                    <a:pt x="6517649" y="201654"/>
+                  </a:lnTo>
+                  <a:lnTo>
+                    <a:pt x="6446027" y="197575"/>
+                  </a:lnTo>
+                  <a:lnTo>
+                    <a:pt x="6374404" y="193470"/>
+                  </a:lnTo>
+                  <a:lnTo>
+                    <a:pt x="6302782" y="189338"/>
+                  </a:lnTo>
+                  <a:lnTo>
+                    <a:pt x="6231159" y="185179"/>
+                  </a:lnTo>
+                  <a:lnTo>
+                    <a:pt x="6159537" y="180993"/>
+                  </a:lnTo>
+                  <a:lnTo>
+                    <a:pt x="6087914" y="176780"/>
+                  </a:lnTo>
+                  <a:lnTo>
+                    <a:pt x="6016292" y="172539"/>
+                  </a:lnTo>
+                  <a:lnTo>
+                    <a:pt x="5944669" y="168271"/>
+                  </a:lnTo>
+                  <a:lnTo>
+                    <a:pt x="5873047" y="163975"/>
+                  </a:lnTo>
+                  <a:lnTo>
+                    <a:pt x="5801424" y="159651"/>
+                  </a:lnTo>
+                  <a:lnTo>
+                    <a:pt x="5729802" y="155299"/>
+                  </a:lnTo>
+                  <a:lnTo>
+                    <a:pt x="5658179" y="150918"/>
+                  </a:lnTo>
+                  <a:lnTo>
+                    <a:pt x="5586557" y="146509"/>
+                  </a:lnTo>
+                  <a:lnTo>
+                    <a:pt x="5514934" y="142071"/>
+                  </a:lnTo>
+                  <a:lnTo>
+                    <a:pt x="5443311" y="137604"/>
+                  </a:lnTo>
+                  <a:lnTo>
+                    <a:pt x="5371689" y="133108"/>
+                  </a:lnTo>
+                  <a:lnTo>
+                    <a:pt x="5300066" y="128583"/>
+                  </a:lnTo>
+                  <a:lnTo>
+                    <a:pt x="5228444" y="124029"/>
+                  </a:lnTo>
+                  <a:lnTo>
+                    <a:pt x="5156821" y="119444"/>
+                  </a:lnTo>
+                  <a:lnTo>
+                    <a:pt x="5085199" y="114830"/>
+                  </a:lnTo>
+                  <a:lnTo>
+                    <a:pt x="5013576" y="110186"/>
+                  </a:lnTo>
+                  <a:lnTo>
+                    <a:pt x="4941954" y="105512"/>
+                  </a:lnTo>
+                  <a:lnTo>
+                    <a:pt x="4870331" y="100807"/>
+                  </a:lnTo>
+                  <a:lnTo>
+                    <a:pt x="4798709" y="96071"/>
+                  </a:lnTo>
+                  <a:lnTo>
+                    <a:pt x="4727086" y="91305"/>
+                  </a:lnTo>
+                  <a:lnTo>
+                    <a:pt x="4655464" y="86507"/>
+                  </a:lnTo>
+                  <a:lnTo>
+                    <a:pt x="4583841" y="81679"/>
+                  </a:lnTo>
+                  <a:lnTo>
+                    <a:pt x="4512219" y="76818"/>
+                  </a:lnTo>
+                  <a:lnTo>
+                    <a:pt x="4440596" y="71927"/>
+                  </a:lnTo>
+                  <a:lnTo>
+                    <a:pt x="4368974" y="67003"/>
+                  </a:lnTo>
+                  <a:lnTo>
+                    <a:pt x="4297351" y="62047"/>
+                  </a:lnTo>
+                  <a:lnTo>
+                    <a:pt x="4225729" y="57059"/>
+                  </a:lnTo>
+                  <a:lnTo>
+                    <a:pt x="4154106" y="52039"/>
+                  </a:lnTo>
+                  <a:lnTo>
+                    <a:pt x="4082483" y="46986"/>
+                  </a:lnTo>
+                  <a:lnTo>
+                    <a:pt x="4010861" y="41899"/>
+                  </a:lnTo>
+                  <a:lnTo>
+                    <a:pt x="3939238" y="36780"/>
+                  </a:lnTo>
+                  <a:lnTo>
+                    <a:pt x="3867616" y="31628"/>
+                  </a:lnTo>
+                  <a:lnTo>
+                    <a:pt x="3795993" y="26441"/>
+                  </a:lnTo>
+                  <a:lnTo>
+                    <a:pt x="3724371" y="21221"/>
+                  </a:lnTo>
+                  <a:lnTo>
+                    <a:pt x="3652748" y="15968"/>
+                  </a:lnTo>
+                  <a:lnTo>
+                    <a:pt x="3581126" y="10679"/>
+                  </a:lnTo>
+                  <a:lnTo>
+                    <a:pt x="3509503" y="5357"/>
                   </a:lnTo>
                   <a:lnTo>
                     <a:pt x="3437881" y="0"/>
                   </a:lnTo>
                   <a:lnTo>
-                    <a:pt x="3366258" y="10034"/>
-                  </a:lnTo>
-                  <a:lnTo>
-                    <a:pt x="3294636" y="26508"/>
-                  </a:lnTo>
-                  <a:lnTo>
-                    <a:pt x="3223013" y="42650"/>
-                  </a:lnTo>
-                  <a:lnTo>
-                    <a:pt x="3151391" y="58467"/>
-                  </a:lnTo>
-                  <a:lnTo>
-                    <a:pt x="3079768" y="73965"/>
-                  </a:lnTo>
-                  <a:lnTo>
-                    <a:pt x="3008146" y="89151"/>
-                  </a:lnTo>
-                  <a:lnTo>
-                    <a:pt x="2936523" y="104031"/>
-                  </a:lnTo>
-                  <a:lnTo>
-                    <a:pt x="2864901" y="118612"/>
-                  </a:lnTo>
-                  <a:lnTo>
-                    <a:pt x="2793278" y="132898"/>
-                  </a:lnTo>
-                  <a:lnTo>
-                    <a:pt x="2721655" y="146897"/>
-                  </a:lnTo>
-                  <a:lnTo>
-                    <a:pt x="2650033" y="160614"/>
-                  </a:lnTo>
-                  <a:lnTo>
-                    <a:pt x="2578410" y="174055"/>
-                  </a:lnTo>
-                  <a:lnTo>
-                    <a:pt x="2506788" y="187225"/>
-                  </a:lnTo>
-                  <a:lnTo>
-                    <a:pt x="2435165" y="200129"/>
-                  </a:lnTo>
-                  <a:lnTo>
-                    <a:pt x="2363543" y="212774"/>
-                  </a:lnTo>
-                  <a:lnTo>
-                    <a:pt x="2291920" y="225164"/>
-                  </a:lnTo>
-                  <a:lnTo>
-                    <a:pt x="2220298" y="237304"/>
-                  </a:lnTo>
-                  <a:lnTo>
-                    <a:pt x="2148675" y="249200"/>
-                  </a:lnTo>
-                  <a:lnTo>
-                    <a:pt x="2077053" y="260856"/>
-                  </a:lnTo>
-                  <a:lnTo>
-                    <a:pt x="2005430" y="272277"/>
-                  </a:lnTo>
-                  <a:lnTo>
-                    <a:pt x="1933808" y="283469"/>
-                  </a:lnTo>
-                  <a:lnTo>
-                    <a:pt x="1862185" y="294434"/>
-                  </a:lnTo>
-                  <a:lnTo>
-                    <a:pt x="1790563" y="305179"/>
-                  </a:lnTo>
-                  <a:lnTo>
-                    <a:pt x="1718940" y="315708"/>
-                  </a:lnTo>
-                  <a:lnTo>
-                    <a:pt x="1647318" y="326024"/>
-                  </a:lnTo>
-                  <a:lnTo>
-                    <a:pt x="1575695" y="336133"/>
-                  </a:lnTo>
-                  <a:lnTo>
-                    <a:pt x="1504073" y="346038"/>
-                  </a:lnTo>
-                  <a:lnTo>
-                    <a:pt x="1432450" y="355743"/>
-                  </a:lnTo>
-                  <a:lnTo>
-                    <a:pt x="1360827" y="365253"/>
-                  </a:lnTo>
-                  <a:lnTo>
-                    <a:pt x="1289205" y="374571"/>
-                  </a:lnTo>
-                  <a:lnTo>
-                    <a:pt x="1217582" y="383702"/>
-                  </a:lnTo>
-                  <a:lnTo>
-                    <a:pt x="1145960" y="392648"/>
-                  </a:lnTo>
-                  <a:lnTo>
-                    <a:pt x="1074337" y="401415"/>
-                  </a:lnTo>
-                  <a:lnTo>
-                    <a:pt x="1002715" y="410005"/>
-                  </a:lnTo>
-                  <a:lnTo>
-                    <a:pt x="931092" y="418422"/>
-                  </a:lnTo>
-                  <a:lnTo>
-                    <a:pt x="859470" y="426669"/>
-                  </a:lnTo>
-                  <a:lnTo>
-                    <a:pt x="787847" y="434750"/>
-                  </a:lnTo>
-                  <a:lnTo>
-                    <a:pt x="716225" y="442668"/>
-                  </a:lnTo>
-                  <a:lnTo>
-                    <a:pt x="644602" y="450427"/>
-                  </a:lnTo>
-                  <a:lnTo>
-                    <a:pt x="572980" y="458030"/>
-                  </a:lnTo>
-                  <a:lnTo>
-                    <a:pt x="501357" y="465479"/>
-                  </a:lnTo>
-                  <a:lnTo>
-                    <a:pt x="429735" y="472778"/>
-                  </a:lnTo>
-                  <a:lnTo>
-                    <a:pt x="358112" y="479931"/>
-                  </a:lnTo>
-                  <a:lnTo>
-                    <a:pt x="286490" y="486939"/>
-                  </a:lnTo>
-                  <a:lnTo>
-                    <a:pt x="214867" y="493806"/>
-                  </a:lnTo>
-                  <a:lnTo>
-                    <a:pt x="143245" y="500535"/>
-                  </a:lnTo>
-                  <a:lnTo>
-                    <a:pt x="71622" y="507128"/>
-                  </a:lnTo>
-                  <a:lnTo>
-                    <a:pt x="0" y="513588"/>
+                    <a:pt x="3366258" y="10021"/>
+                  </a:lnTo>
+                  <a:lnTo>
+                    <a:pt x="3294636" y="26487"/>
+                  </a:lnTo>
+                  <a:lnTo>
+                    <a:pt x="3223013" y="42621"/>
+                  </a:lnTo>
+                  <a:lnTo>
+                    <a:pt x="3151391" y="58430"/>
+                  </a:lnTo>
+                  <a:lnTo>
+                    <a:pt x="3079768" y="73920"/>
+                  </a:lnTo>
+                  <a:lnTo>
+                    <a:pt x="3008146" y="89099"/>
+                  </a:lnTo>
+                  <a:lnTo>
+                    <a:pt x="2936523" y="103972"/>
+                  </a:lnTo>
+                  <a:lnTo>
+                    <a:pt x="2864901" y="118546"/>
+                  </a:lnTo>
+                  <a:lnTo>
+                    <a:pt x="2793278" y="132826"/>
+                  </a:lnTo>
+                  <a:lnTo>
+                    <a:pt x="2721655" y="146819"/>
+                  </a:lnTo>
+                  <a:lnTo>
+                    <a:pt x="2650033" y="160530"/>
+                  </a:lnTo>
+                  <a:lnTo>
+                    <a:pt x="2578410" y="173966"/>
+                  </a:lnTo>
+                  <a:lnTo>
+                    <a:pt x="2506788" y="187130"/>
+                  </a:lnTo>
+                  <a:lnTo>
+                    <a:pt x="2435165" y="200030"/>
+                  </a:lnTo>
+                  <a:lnTo>
+                    <a:pt x="2363543" y="212669"/>
+                  </a:lnTo>
+                  <a:lnTo>
+                    <a:pt x="2291920" y="225055"/>
+                  </a:lnTo>
+                  <a:lnTo>
+                    <a:pt x="2220298" y="237191"/>
+                  </a:lnTo>
+                  <a:lnTo>
+                    <a:pt x="2148675" y="249082"/>
+                  </a:lnTo>
+                  <a:lnTo>
+                    <a:pt x="2077053" y="260735"/>
+                  </a:lnTo>
+                  <a:lnTo>
+                    <a:pt x="2005430" y="272152"/>
+                  </a:lnTo>
+                  <a:lnTo>
+                    <a:pt x="1933808" y="283340"/>
+                  </a:lnTo>
+                  <a:lnTo>
+                    <a:pt x="1862185" y="294302"/>
+                  </a:lnTo>
+                  <a:lnTo>
+                    <a:pt x="1790563" y="305044"/>
+                  </a:lnTo>
+                  <a:lnTo>
+                    <a:pt x="1718940" y="315570"/>
+                  </a:lnTo>
+                  <a:lnTo>
+                    <a:pt x="1647318" y="325883"/>
+                  </a:lnTo>
+                  <a:lnTo>
+                    <a:pt x="1575695" y="335989"/>
+                  </a:lnTo>
+                  <a:lnTo>
+                    <a:pt x="1504073" y="345892"/>
+                  </a:lnTo>
+                  <a:lnTo>
+                    <a:pt x="1432450" y="355595"/>
+                  </a:lnTo>
+                  <a:lnTo>
+                    <a:pt x="1360827" y="365102"/>
+                  </a:lnTo>
+                  <a:lnTo>
+                    <a:pt x="1289205" y="374419"/>
+                  </a:lnTo>
+                  <a:lnTo>
+                    <a:pt x="1217582" y="383547"/>
+                  </a:lnTo>
+                  <a:lnTo>
+                    <a:pt x="1145960" y="392492"/>
+                  </a:lnTo>
+                  <a:lnTo>
+                    <a:pt x="1074337" y="401257"/>
+                  </a:lnTo>
+                  <a:lnTo>
+                    <a:pt x="1002715" y="409846"/>
+                  </a:lnTo>
+                  <a:lnTo>
+                    <a:pt x="931092" y="418261"/>
+                  </a:lnTo>
+                  <a:lnTo>
+                    <a:pt x="859470" y="426507"/>
+                  </a:lnTo>
+                  <a:lnTo>
+                    <a:pt x="787847" y="434587"/>
+                  </a:lnTo>
+                  <a:lnTo>
+                    <a:pt x="716225" y="442504"/>
+                  </a:lnTo>
+                  <a:lnTo>
+                    <a:pt x="644602" y="450262"/>
+                  </a:lnTo>
+                  <a:lnTo>
+                    <a:pt x="572980" y="457864"/>
+                  </a:lnTo>
+                  <a:lnTo>
+                    <a:pt x="501357" y="465313"/>
+                  </a:lnTo>
+                  <a:lnTo>
+                    <a:pt x="429735" y="472611"/>
+                  </a:lnTo>
+                  <a:lnTo>
+                    <a:pt x="358112" y="479763"/>
+                  </a:lnTo>
+                  <a:lnTo>
+                    <a:pt x="286490" y="486771"/>
+                  </a:lnTo>
+                  <a:lnTo>
+                    <a:pt x="214867" y="493638"/>
+                  </a:lnTo>
+                  <a:lnTo>
+                    <a:pt x="143245" y="500366"/>
+                  </a:lnTo>
+                  <a:lnTo>
+                    <a:pt x="71622" y="506959"/>
+                  </a:lnTo>
+                  <a:lnTo>
+                    <a:pt x="0" y="513419"/>
                   </a:lnTo>
                 </a:path>
               </a:pathLst>
@@ -4713,309 +4713,309 @@
           </p:nvSpPr>
           <p:spPr>
             <a:xfrm>
-              <a:off x="1172049" y="4372964"/>
-              <a:ext cx="7090630" cy="588602"/>
+              <a:off x="1172049" y="4374059"/>
+              <a:ext cx="7090630" cy="586995"/>
             </a:xfrm>
             <a:custGeom>
               <a:avLst/>
               <a:pathLst>
-                <a:path w="7090630" h="588602">
+                <a:path w="7090630" h="586995">
                   <a:moveTo>
-                    <a:pt x="0" y="588602"/>
+                    <a:pt x="0" y="586995"/>
                   </a:moveTo>
                   <a:lnTo>
-                    <a:pt x="71622" y="584452"/>
-                  </a:lnTo>
-                  <a:lnTo>
-                    <a:pt x="143245" y="580274"/>
-                  </a:lnTo>
-                  <a:lnTo>
-                    <a:pt x="214867" y="576067"/>
-                  </a:lnTo>
-                  <a:lnTo>
-                    <a:pt x="286490" y="571831"/>
-                  </a:lnTo>
-                  <a:lnTo>
-                    <a:pt x="358112" y="567565"/>
-                  </a:lnTo>
-                  <a:lnTo>
-                    <a:pt x="429735" y="563269"/>
-                  </a:lnTo>
-                  <a:lnTo>
-                    <a:pt x="501357" y="558943"/>
-                  </a:lnTo>
-                  <a:lnTo>
-                    <a:pt x="572980" y="554588"/>
-                  </a:lnTo>
-                  <a:lnTo>
-                    <a:pt x="644602" y="550201"/>
-                  </a:lnTo>
-                  <a:lnTo>
-                    <a:pt x="716225" y="545785"/>
-                  </a:lnTo>
-                  <a:lnTo>
-                    <a:pt x="787847" y="541337"/>
-                  </a:lnTo>
-                  <a:lnTo>
-                    <a:pt x="859470" y="536859"/>
-                  </a:lnTo>
-                  <a:lnTo>
-                    <a:pt x="931092" y="532349"/>
-                  </a:lnTo>
-                  <a:lnTo>
-                    <a:pt x="1002715" y="527808"/>
-                  </a:lnTo>
-                  <a:lnTo>
-                    <a:pt x="1074337" y="523236"/>
-                  </a:lnTo>
-                  <a:lnTo>
-                    <a:pt x="1145960" y="518631"/>
-                  </a:lnTo>
-                  <a:lnTo>
-                    <a:pt x="1217582" y="513995"/>
-                  </a:lnTo>
-                  <a:lnTo>
-                    <a:pt x="1289205" y="509326"/>
-                  </a:lnTo>
-                  <a:lnTo>
-                    <a:pt x="1360827" y="504624"/>
-                  </a:lnTo>
-                  <a:lnTo>
-                    <a:pt x="1432450" y="499890"/>
-                  </a:lnTo>
-                  <a:lnTo>
-                    <a:pt x="1504073" y="495123"/>
-                  </a:lnTo>
-                  <a:lnTo>
-                    <a:pt x="1575695" y="490323"/>
-                  </a:lnTo>
-                  <a:lnTo>
-                    <a:pt x="1647318" y="485489"/>
-                  </a:lnTo>
-                  <a:lnTo>
-                    <a:pt x="1718940" y="480622"/>
-                  </a:lnTo>
-                  <a:lnTo>
-                    <a:pt x="1790563" y="475721"/>
-                  </a:lnTo>
-                  <a:lnTo>
-                    <a:pt x="1862185" y="470785"/>
-                  </a:lnTo>
-                  <a:lnTo>
-                    <a:pt x="1933808" y="465815"/>
-                  </a:lnTo>
-                  <a:lnTo>
-                    <a:pt x="2005430" y="460811"/>
-                  </a:lnTo>
-                  <a:lnTo>
-                    <a:pt x="2077053" y="455772"/>
-                  </a:lnTo>
-                  <a:lnTo>
-                    <a:pt x="2148675" y="450697"/>
-                  </a:lnTo>
-                  <a:lnTo>
-                    <a:pt x="2220298" y="445587"/>
-                  </a:lnTo>
-                  <a:lnTo>
-                    <a:pt x="2291920" y="440442"/>
-                  </a:lnTo>
-                  <a:lnTo>
-                    <a:pt x="2363543" y="435261"/>
-                  </a:lnTo>
-                  <a:lnTo>
-                    <a:pt x="2435165" y="430044"/>
-                  </a:lnTo>
-                  <a:lnTo>
-                    <a:pt x="2506788" y="424790"/>
-                  </a:lnTo>
-                  <a:lnTo>
-                    <a:pt x="2578410" y="419500"/>
-                  </a:lnTo>
-                  <a:lnTo>
-                    <a:pt x="2650033" y="414173"/>
-                  </a:lnTo>
-                  <a:lnTo>
-                    <a:pt x="2721655" y="408809"/>
-                  </a:lnTo>
-                  <a:lnTo>
-                    <a:pt x="2793278" y="403407"/>
-                  </a:lnTo>
-                  <a:lnTo>
-                    <a:pt x="2864901" y="397968"/>
-                  </a:lnTo>
-                  <a:lnTo>
-                    <a:pt x="2936523" y="392491"/>
-                  </a:lnTo>
-                  <a:lnTo>
-                    <a:pt x="3008146" y="386976"/>
-                  </a:lnTo>
-                  <a:lnTo>
-                    <a:pt x="3079768" y="381422"/>
-                  </a:lnTo>
-                  <a:lnTo>
-                    <a:pt x="3151391" y="375830"/>
-                  </a:lnTo>
-                  <a:lnTo>
-                    <a:pt x="3223013" y="370199"/>
-                  </a:lnTo>
-                  <a:lnTo>
-                    <a:pt x="3294636" y="364528"/>
-                  </a:lnTo>
-                  <a:lnTo>
-                    <a:pt x="3366258" y="358818"/>
-                  </a:lnTo>
-                  <a:lnTo>
-                    <a:pt x="3437881" y="353069"/>
-                  </a:lnTo>
-                  <a:lnTo>
-                    <a:pt x="3509503" y="347279"/>
-                  </a:lnTo>
-                  <a:lnTo>
-                    <a:pt x="3581126" y="341449"/>
-                  </a:lnTo>
-                  <a:lnTo>
-                    <a:pt x="3652748" y="335578"/>
-                  </a:lnTo>
-                  <a:lnTo>
-                    <a:pt x="3724371" y="329666"/>
-                  </a:lnTo>
-                  <a:lnTo>
-                    <a:pt x="3795993" y="323714"/>
-                  </a:lnTo>
-                  <a:lnTo>
-                    <a:pt x="3867616" y="317719"/>
-                  </a:lnTo>
-                  <a:lnTo>
-                    <a:pt x="3939238" y="311683"/>
-                  </a:lnTo>
-                  <a:lnTo>
-                    <a:pt x="4010861" y="305605"/>
-                  </a:lnTo>
-                  <a:lnTo>
-                    <a:pt x="4082483" y="299485"/>
-                  </a:lnTo>
-                  <a:lnTo>
-                    <a:pt x="4154106" y="293322"/>
-                  </a:lnTo>
-                  <a:lnTo>
-                    <a:pt x="4225729" y="287116"/>
-                  </a:lnTo>
-                  <a:lnTo>
-                    <a:pt x="4297351" y="280867"/>
-                  </a:lnTo>
-                  <a:lnTo>
-                    <a:pt x="4368974" y="274574"/>
-                  </a:lnTo>
-                  <a:lnTo>
-                    <a:pt x="4440596" y="268238"/>
-                  </a:lnTo>
-                  <a:lnTo>
-                    <a:pt x="4512219" y="261857"/>
-                  </a:lnTo>
-                  <a:lnTo>
-                    <a:pt x="4583841" y="255432"/>
-                  </a:lnTo>
-                  <a:lnTo>
-                    <a:pt x="4655464" y="248962"/>
-                  </a:lnTo>
-                  <a:lnTo>
-                    <a:pt x="4727086" y="242447"/>
-                  </a:lnTo>
-                  <a:lnTo>
-                    <a:pt x="4798709" y="235887"/>
-                  </a:lnTo>
-                  <a:lnTo>
-                    <a:pt x="4870331" y="229281"/>
-                  </a:lnTo>
-                  <a:lnTo>
-                    <a:pt x="4941954" y="222629"/>
-                  </a:lnTo>
-                  <a:lnTo>
-                    <a:pt x="5013576" y="215931"/>
-                  </a:lnTo>
-                  <a:lnTo>
-                    <a:pt x="5085199" y="209186"/>
-                  </a:lnTo>
-                  <a:lnTo>
-                    <a:pt x="5156821" y="202394"/>
-                  </a:lnTo>
-                  <a:lnTo>
-                    <a:pt x="5228444" y="195554"/>
-                  </a:lnTo>
-                  <a:lnTo>
-                    <a:pt x="5300066" y="188667"/>
-                  </a:lnTo>
-                  <a:lnTo>
-                    <a:pt x="5371689" y="181733"/>
-                  </a:lnTo>
-                  <a:lnTo>
-                    <a:pt x="5443311" y="174749"/>
-                  </a:lnTo>
-                  <a:lnTo>
-                    <a:pt x="5514934" y="167718"/>
-                  </a:lnTo>
-                  <a:lnTo>
-                    <a:pt x="5586557" y="160637"/>
-                  </a:lnTo>
-                  <a:lnTo>
-                    <a:pt x="5658179" y="153507"/>
-                  </a:lnTo>
-                  <a:lnTo>
-                    <a:pt x="5729802" y="146327"/>
-                  </a:lnTo>
-                  <a:lnTo>
-                    <a:pt x="5801424" y="139097"/>
-                  </a:lnTo>
-                  <a:lnTo>
-                    <a:pt x="5873047" y="131817"/>
-                  </a:lnTo>
-                  <a:lnTo>
-                    <a:pt x="5944669" y="124486"/>
-                  </a:lnTo>
-                  <a:lnTo>
-                    <a:pt x="6016292" y="117104"/>
-                  </a:lnTo>
-                  <a:lnTo>
-                    <a:pt x="6087914" y="109671"/>
-                  </a:lnTo>
-                  <a:lnTo>
-                    <a:pt x="6159537" y="102185"/>
-                  </a:lnTo>
-                  <a:lnTo>
-                    <a:pt x="6231159" y="94648"/>
-                  </a:lnTo>
-                  <a:lnTo>
-                    <a:pt x="6302782" y="87058"/>
-                  </a:lnTo>
-                  <a:lnTo>
-                    <a:pt x="6374404" y="79416"/>
-                  </a:lnTo>
-                  <a:lnTo>
-                    <a:pt x="6446027" y="71720"/>
-                  </a:lnTo>
-                  <a:lnTo>
-                    <a:pt x="6517649" y="63970"/>
-                  </a:lnTo>
-                  <a:lnTo>
-                    <a:pt x="6589272" y="56167"/>
-                  </a:lnTo>
-                  <a:lnTo>
-                    <a:pt x="6660894" y="48309"/>
-                  </a:lnTo>
-                  <a:lnTo>
-                    <a:pt x="6732517" y="40397"/>
-                  </a:lnTo>
-                  <a:lnTo>
-                    <a:pt x="6804139" y="32429"/>
-                  </a:lnTo>
-                  <a:lnTo>
-                    <a:pt x="6875762" y="24406"/>
-                  </a:lnTo>
-                  <a:lnTo>
-                    <a:pt x="6947385" y="16327"/>
-                  </a:lnTo>
-                  <a:lnTo>
-                    <a:pt x="7019007" y="8191"/>
+                    <a:pt x="71622" y="582853"/>
+                  </a:lnTo>
+                  <a:lnTo>
+                    <a:pt x="143245" y="578682"/>
+                  </a:lnTo>
+                  <a:lnTo>
+                    <a:pt x="214867" y="574483"/>
+                  </a:lnTo>
+                  <a:lnTo>
+                    <a:pt x="286490" y="570254"/>
+                  </a:lnTo>
+                  <a:lnTo>
+                    <a:pt x="358112" y="565995"/>
+                  </a:lnTo>
+                  <a:lnTo>
+                    <a:pt x="429735" y="561708"/>
+                  </a:lnTo>
+                  <a:lnTo>
+                    <a:pt x="501357" y="557390"/>
+                  </a:lnTo>
+                  <a:lnTo>
+                    <a:pt x="572980" y="553042"/>
+                  </a:lnTo>
+                  <a:lnTo>
+                    <a:pt x="644602" y="548665"/>
+                  </a:lnTo>
+                  <a:lnTo>
+                    <a:pt x="716225" y="544256"/>
+                  </a:lnTo>
+                  <a:lnTo>
+                    <a:pt x="787847" y="539818"/>
+                  </a:lnTo>
+                  <a:lnTo>
+                    <a:pt x="859470" y="535348"/>
+                  </a:lnTo>
+                  <a:lnTo>
+                    <a:pt x="931092" y="530847"/>
+                  </a:lnTo>
+                  <a:lnTo>
+                    <a:pt x="1002715" y="526315"/>
+                  </a:lnTo>
+                  <a:lnTo>
+                    <a:pt x="1074337" y="521752"/>
+                  </a:lnTo>
+                  <a:lnTo>
+                    <a:pt x="1145960" y="517156"/>
+                  </a:lnTo>
+                  <a:lnTo>
+                    <a:pt x="1217582" y="512529"/>
+                  </a:lnTo>
+                  <a:lnTo>
+                    <a:pt x="1289205" y="507870"/>
+                  </a:lnTo>
+                  <a:lnTo>
+                    <a:pt x="1360827" y="503178"/>
+                  </a:lnTo>
+                  <a:lnTo>
+                    <a:pt x="1432450" y="498454"/>
+                  </a:lnTo>
+                  <a:lnTo>
+                    <a:pt x="1504073" y="493697"/>
+                  </a:lnTo>
+                  <a:lnTo>
+                    <a:pt x="1575695" y="488907"/>
+                  </a:lnTo>
+                  <a:lnTo>
+                    <a:pt x="1647318" y="484084"/>
+                  </a:lnTo>
+                  <a:lnTo>
+                    <a:pt x="1718940" y="479227"/>
+                  </a:lnTo>
+                  <a:lnTo>
+                    <a:pt x="1790563" y="474336"/>
+                  </a:lnTo>
+                  <a:lnTo>
+                    <a:pt x="1862185" y="469412"/>
+                  </a:lnTo>
+                  <a:lnTo>
+                    <a:pt x="1933808" y="464453"/>
+                  </a:lnTo>
+                  <a:lnTo>
+                    <a:pt x="2005430" y="459460"/>
+                  </a:lnTo>
+                  <a:lnTo>
+                    <a:pt x="2077053" y="454432"/>
+                  </a:lnTo>
+                  <a:lnTo>
+                    <a:pt x="2148675" y="449369"/>
+                  </a:lnTo>
+                  <a:lnTo>
+                    <a:pt x="2220298" y="444271"/>
+                  </a:lnTo>
+                  <a:lnTo>
+                    <a:pt x="2291920" y="439137"/>
+                  </a:lnTo>
+                  <a:lnTo>
+                    <a:pt x="2363543" y="433968"/>
+                  </a:lnTo>
+                  <a:lnTo>
+                    <a:pt x="2435165" y="428763"/>
+                  </a:lnTo>
+                  <a:lnTo>
+                    <a:pt x="2506788" y="423522"/>
+                  </a:lnTo>
+                  <a:lnTo>
+                    <a:pt x="2578410" y="418244"/>
+                  </a:lnTo>
+                  <a:lnTo>
+                    <a:pt x="2650033" y="412930"/>
+                  </a:lnTo>
+                  <a:lnTo>
+                    <a:pt x="2721655" y="407579"/>
+                  </a:lnTo>
+                  <a:lnTo>
+                    <a:pt x="2793278" y="402190"/>
+                  </a:lnTo>
+                  <a:lnTo>
+                    <a:pt x="2864901" y="396764"/>
+                  </a:lnTo>
+                  <a:lnTo>
+                    <a:pt x="2936523" y="391301"/>
+                  </a:lnTo>
+                  <a:lnTo>
+                    <a:pt x="3008146" y="385799"/>
+                  </a:lnTo>
+                  <a:lnTo>
+                    <a:pt x="3079768" y="380260"/>
+                  </a:lnTo>
+                  <a:lnTo>
+                    <a:pt x="3151391" y="374682"/>
+                  </a:lnTo>
+                  <a:lnTo>
+                    <a:pt x="3223013" y="369065"/>
+                  </a:lnTo>
+                  <a:lnTo>
+                    <a:pt x="3294636" y="363409"/>
+                  </a:lnTo>
+                  <a:lnTo>
+                    <a:pt x="3366258" y="357713"/>
+                  </a:lnTo>
+                  <a:lnTo>
+                    <a:pt x="3437881" y="351979"/>
+                  </a:lnTo>
+                  <a:lnTo>
+                    <a:pt x="3509503" y="346204"/>
+                  </a:lnTo>
+                  <a:lnTo>
+                    <a:pt x="3581126" y="340389"/>
+                  </a:lnTo>
+                  <a:lnTo>
+                    <a:pt x="3652748" y="334534"/>
+                  </a:lnTo>
+                  <a:lnTo>
+                    <a:pt x="3724371" y="328638"/>
+                  </a:lnTo>
+                  <a:lnTo>
+                    <a:pt x="3795993" y="322701"/>
+                  </a:lnTo>
+                  <a:lnTo>
+                    <a:pt x="3867616" y="316723"/>
+                  </a:lnTo>
+                  <a:lnTo>
+                    <a:pt x="3939238" y="310704"/>
+                  </a:lnTo>
+                  <a:lnTo>
+                    <a:pt x="4010861" y="304642"/>
+                  </a:lnTo>
+                  <a:lnTo>
+                    <a:pt x="4082483" y="298539"/>
+                  </a:lnTo>
+                  <a:lnTo>
+                    <a:pt x="4154106" y="292393"/>
+                  </a:lnTo>
+                  <a:lnTo>
+                    <a:pt x="4225729" y="286204"/>
+                  </a:lnTo>
+                  <a:lnTo>
+                    <a:pt x="4297351" y="279973"/>
+                  </a:lnTo>
+                  <a:lnTo>
+                    <a:pt x="4368974" y="273698"/>
+                  </a:lnTo>
+                  <a:lnTo>
+                    <a:pt x="4440596" y="267379"/>
+                  </a:lnTo>
+                  <a:lnTo>
+                    <a:pt x="4512219" y="261017"/>
+                  </a:lnTo>
+                  <a:lnTo>
+                    <a:pt x="4583841" y="254610"/>
+                  </a:lnTo>
+                  <a:lnTo>
+                    <a:pt x="4655464" y="248159"/>
+                  </a:lnTo>
+                  <a:lnTo>
+                    <a:pt x="4727086" y="241663"/>
+                  </a:lnTo>
+                  <a:lnTo>
+                    <a:pt x="4798709" y="235122"/>
+                  </a:lnTo>
+                  <a:lnTo>
+                    <a:pt x="4870331" y="228536"/>
+                  </a:lnTo>
+                  <a:lnTo>
+                    <a:pt x="4941954" y="221904"/>
+                  </a:lnTo>
+                  <a:lnTo>
+                    <a:pt x="5013576" y="215225"/>
+                  </a:lnTo>
+                  <a:lnTo>
+                    <a:pt x="5085199" y="208501"/>
+                  </a:lnTo>
+                  <a:lnTo>
+                    <a:pt x="5156821" y="201729"/>
+                  </a:lnTo>
+                  <a:lnTo>
+                    <a:pt x="5228444" y="194911"/>
+                  </a:lnTo>
+                  <a:lnTo>
+                    <a:pt x="5300066" y="188045"/>
+                  </a:lnTo>
+                  <a:lnTo>
+                    <a:pt x="5371689" y="181131"/>
+                  </a:lnTo>
+                  <a:lnTo>
+                    <a:pt x="5443311" y="174170"/>
+                  </a:lnTo>
+                  <a:lnTo>
+                    <a:pt x="5514934" y="167160"/>
+                  </a:lnTo>
+                  <a:lnTo>
+                    <a:pt x="5586557" y="160101"/>
+                  </a:lnTo>
+                  <a:lnTo>
+                    <a:pt x="5658179" y="152993"/>
+                  </a:lnTo>
+                  <a:lnTo>
+                    <a:pt x="5729802" y="145836"/>
+                  </a:lnTo>
+                  <a:lnTo>
+                    <a:pt x="5801424" y="138630"/>
+                  </a:lnTo>
+                  <a:lnTo>
+                    <a:pt x="5873047" y="131373"/>
+                  </a:lnTo>
+                  <a:lnTo>
+                    <a:pt x="5944669" y="124066"/>
+                  </a:lnTo>
+                  <a:lnTo>
+                    <a:pt x="6016292" y="116708"/>
+                  </a:lnTo>
+                  <a:lnTo>
+                    <a:pt x="6087914" y="109298"/>
+                  </a:lnTo>
+                  <a:lnTo>
+                    <a:pt x="6159537" y="101838"/>
+                  </a:lnTo>
+                  <a:lnTo>
+                    <a:pt x="6231159" y="94325"/>
+                  </a:lnTo>
+                  <a:lnTo>
+                    <a:pt x="6302782" y="86761"/>
+                  </a:lnTo>
+                  <a:lnTo>
+                    <a:pt x="6374404" y="79143"/>
+                  </a:lnTo>
+                  <a:lnTo>
+                    <a:pt x="6446027" y="71473"/>
+                  </a:lnTo>
+                  <a:lnTo>
+                    <a:pt x="6517649" y="63750"/>
+                  </a:lnTo>
+                  <a:lnTo>
+                    <a:pt x="6589272" y="55973"/>
+                  </a:lnTo>
+                  <a:lnTo>
+                    <a:pt x="6660894" y="48142"/>
+                  </a:lnTo>
+                  <a:lnTo>
+                    <a:pt x="6732517" y="40256"/>
+                  </a:lnTo>
+                  <a:lnTo>
+                    <a:pt x="6804139" y="32316"/>
+                  </a:lnTo>
+                  <a:lnTo>
+                    <a:pt x="6875762" y="24321"/>
+                  </a:lnTo>
+                  <a:lnTo>
+                    <a:pt x="6947385" y="16270"/>
+                  </a:lnTo>
+                  <a:lnTo>
+                    <a:pt x="7019007" y="8163"/>
                   </a:lnTo>
                   <a:lnTo>
                     <a:pt x="7090630" y="0"/>
@@ -5902,7 +5902,7 @@
                   <a:latin typeface="Helvetica"/>
                   <a:cs typeface="Helvetica"/>
                 </a:rPr>
-                <a:t>subHR per 10 % decline: 0.92 (0.78-1.08), p = 0.310  |  per IQR decline (Δ = 29.3 %): 0.78 (0.49-1.26)  |  IQR: [-14.6, 14.7] %</a:t>
+                <a:t>subHR per 10 % decline: 0.92 (0.78-1.08), p = 0.312  |  per IQR decline (Δ = 29.3 %): 0.78 (0.49-1.26)  |  IQR: [-14.6, 14.7] %</a:t>
               </a:r>
             </a:p>
           </p:txBody>
